--- a/final_project_presentation.pptx
+++ b/final_project_presentation.pptx
@@ -2,28 +2,28 @@
 <file path=ppt/presentation.xml><?xml version="1.0" encoding="utf-8"?>
 <p:presentation xmlns:p="http://schemas.openxmlformats.org/presentationml/2006/main">
   <p:sldMasterIdLst>
-    <p:sldMasterId xmlns:r="http://schemas.openxmlformats.org/officeDocument/2006/relationships" id="2147483648" r:id="Rd79a5cd2cc954083"/>
+    <p:sldMasterId xmlns:r="http://schemas.openxmlformats.org/officeDocument/2006/relationships" id="2147483648" r:id="R3539fcb4567e418a"/>
   </p:sldMasterIdLst>
   <p:notesMasterIdLst>
-    <p:notesMasterId xmlns:r="http://schemas.openxmlformats.org/officeDocument/2006/relationships" r:id="R6e42a2cc538743a5"/>
+    <p:notesMasterId xmlns:r="http://schemas.openxmlformats.org/officeDocument/2006/relationships" r:id="R6fe1d9b0795c4332"/>
   </p:notesMasterIdLst>
   <p:sldIdLst>
-    <p:sldId xmlns:r="http://schemas.openxmlformats.org/officeDocument/2006/relationships" id="256" r:id="Rde1aedc7f49e450c"/>
-    <p:sldId xmlns:r="http://schemas.openxmlformats.org/officeDocument/2006/relationships" id="257" r:id="R8b20c29945704431"/>
-    <p:sldId xmlns:r="http://schemas.openxmlformats.org/officeDocument/2006/relationships" id="258" r:id="R29b570bb07d1455f"/>
-    <p:sldId xmlns:r="http://schemas.openxmlformats.org/officeDocument/2006/relationships" id="259" r:id="Rbefe373d04254fff"/>
-    <p:sldId xmlns:r="http://schemas.openxmlformats.org/officeDocument/2006/relationships" id="260" r:id="R4ec3e91c724d47f5"/>
-    <p:sldId xmlns:r="http://schemas.openxmlformats.org/officeDocument/2006/relationships" id="261" r:id="R0dc6011680394535"/>
-    <p:sldId xmlns:r="http://schemas.openxmlformats.org/officeDocument/2006/relationships" id="262" r:id="Reeddd517aeea4d62"/>
-    <p:sldId xmlns:r="http://schemas.openxmlformats.org/officeDocument/2006/relationships" id="263" r:id="Rddfa878716ad4315"/>
-    <p:sldId xmlns:r="http://schemas.openxmlformats.org/officeDocument/2006/relationships" id="264" r:id="R1e2022f164104e6b"/>
-    <p:sldId xmlns:r="http://schemas.openxmlformats.org/officeDocument/2006/relationships" id="265" r:id="R422d3527db224f2e"/>
-    <p:sldId xmlns:r="http://schemas.openxmlformats.org/officeDocument/2006/relationships" id="266" r:id="R3731f7fefd404d2b"/>
-    <p:sldId xmlns:r="http://schemas.openxmlformats.org/officeDocument/2006/relationships" id="267" r:id="Rca092f7c54e64ea8"/>
-    <p:sldId xmlns:r="http://schemas.openxmlformats.org/officeDocument/2006/relationships" id="268" r:id="R58b4c85ce8814fb0"/>
-    <p:sldId xmlns:r="http://schemas.openxmlformats.org/officeDocument/2006/relationships" id="269" r:id="R48b454ba34654e55"/>
-    <p:sldId xmlns:r="http://schemas.openxmlformats.org/officeDocument/2006/relationships" id="270" r:id="Ra973fefec3a34f4b"/>
-    <p:sldId xmlns:r="http://schemas.openxmlformats.org/officeDocument/2006/relationships" id="271" r:id="Rb6a4c2dbcc024a62"/>
+    <p:sldId xmlns:r="http://schemas.openxmlformats.org/officeDocument/2006/relationships" id="256" r:id="R3cbbed1b468b42d7"/>
+    <p:sldId xmlns:r="http://schemas.openxmlformats.org/officeDocument/2006/relationships" id="257" r:id="Rd7db35dd134a4c2f"/>
+    <p:sldId xmlns:r="http://schemas.openxmlformats.org/officeDocument/2006/relationships" id="258" r:id="Rb86b6aedde434347"/>
+    <p:sldId xmlns:r="http://schemas.openxmlformats.org/officeDocument/2006/relationships" id="259" r:id="R55ad1afc430f4ee3"/>
+    <p:sldId xmlns:r="http://schemas.openxmlformats.org/officeDocument/2006/relationships" id="260" r:id="R608d12d70c254684"/>
+    <p:sldId xmlns:r="http://schemas.openxmlformats.org/officeDocument/2006/relationships" id="261" r:id="R0422cfcf97ab4d77"/>
+    <p:sldId xmlns:r="http://schemas.openxmlformats.org/officeDocument/2006/relationships" id="262" r:id="Rbfbe52aaf1914af7"/>
+    <p:sldId xmlns:r="http://schemas.openxmlformats.org/officeDocument/2006/relationships" id="263" r:id="Rb7a2ea28fcd44861"/>
+    <p:sldId xmlns:r="http://schemas.openxmlformats.org/officeDocument/2006/relationships" id="264" r:id="Rb1366a09434d4d1c"/>
+    <p:sldId xmlns:r="http://schemas.openxmlformats.org/officeDocument/2006/relationships" id="265" r:id="R5f41e08fa6dd4f90"/>
+    <p:sldId xmlns:r="http://schemas.openxmlformats.org/officeDocument/2006/relationships" id="266" r:id="Red21c7fa20344f1c"/>
+    <p:sldId xmlns:r="http://schemas.openxmlformats.org/officeDocument/2006/relationships" id="267" r:id="R903747cf84724290"/>
+    <p:sldId xmlns:r="http://schemas.openxmlformats.org/officeDocument/2006/relationships" id="268" r:id="R930cacf744344594"/>
+    <p:sldId xmlns:r="http://schemas.openxmlformats.org/officeDocument/2006/relationships" id="269" r:id="R6e8c673446734a6e"/>
+    <p:sldId xmlns:r="http://schemas.openxmlformats.org/officeDocument/2006/relationships" id="270" r:id="Rf8b756d64e1c4c21"/>
+    <p:sldId xmlns:r="http://schemas.openxmlformats.org/officeDocument/2006/relationships" id="271" r:id="R223bf1018bc84458"/>
   </p:sldIdLst>
   <p:sldSz cx="12192000" cy="6858000"/>
   <p:notesSz cx="6858000" cy="9144000"/>
@@ -1675,7 +1675,7 @@
   </p:cSld>
   <p:clrMap bg1="lt1" tx1="dk1" bg2="lt2" tx2="dk2" accent1="accent1" accent2="accent2" accent3="accent3" accent4="accent4" accent5="accent5" accent6="accent6" hlink="hlink" folHlink="folHlink"/>
   <p:sldLayoutIdLst>
-    <p:sldLayoutId xmlns:r="http://schemas.openxmlformats.org/officeDocument/2006/relationships" id="2147483649" r:id="R5051b6bb93b849a1"/>
+    <p:sldLayoutId xmlns:r="http://schemas.openxmlformats.org/officeDocument/2006/relationships" id="2147483649" r:id="R9288f96db0c945b4"/>
   </p:sldLayoutIdLst>
   <p:txStyles>
     <p:titleStyle>
@@ -2226,7 +2226,7 @@
           <p:cNvPr id="6" name="title-kicker">
             <a:extLst xmlns:a="http://schemas.openxmlformats.org/drawingml/2006/main">
               <a:ext uri="{FF2B5EF4-FFF2-40B4-BE49-F238E27FC236}">
-                <a16:creationId xmlns:a16="http://schemas.microsoft.com/office/drawing/2014/main" id="{F28F227B-36D2-4F3A-B3F8-2404FDE3B92C}"/>
+                <a16:creationId xmlns:a16="http://schemas.microsoft.com/office/drawing/2014/main" id="{80FAA4A7-DFB7-46C0-A38D-58F0413DC9C5}"/>
               </a:ext>
             </a:extLst>
           </p:cNvPr>
@@ -2284,7 +2284,7 @@
           <p:cNvPr id="2" name="deck-title">
             <a:extLst xmlns:a="http://schemas.openxmlformats.org/drawingml/2006/main">
               <a:ext uri="{FF2B5EF4-FFF2-40B4-BE49-F238E27FC236}">
-                <a16:creationId xmlns:a16="http://schemas.microsoft.com/office/drawing/2014/main" id="{C189C36E-0FBE-4909-AD11-A311CE0202DD}"/>
+                <a16:creationId xmlns:a16="http://schemas.microsoft.com/office/drawing/2014/main" id="{24BC4E03-C9F2-4114-BB88-96E6D9EE5F40}"/>
               </a:ext>
             </a:extLst>
           </p:cNvPr>
@@ -2365,7 +2365,7 @@
           <p:cNvPr id="3" name="">
             <a:extLst xmlns:a="http://schemas.openxmlformats.org/drawingml/2006/main">
               <a:ext uri="{FF2B5EF4-FFF2-40B4-BE49-F238E27FC236}">
-                <a16:creationId xmlns:a16="http://schemas.microsoft.com/office/drawing/2014/main" id="{A2C1A983-CA97-4C17-8DE9-2D86675996C9}"/>
+                <a16:creationId xmlns:a16="http://schemas.microsoft.com/office/drawing/2014/main" id="{B189A283-FF16-4CA1-88C7-AB4AF0C9AB49}"/>
               </a:ext>
             </a:extLst>
           </p:cNvPr>
@@ -2398,7 +2398,7 @@
           <p:cNvPr id="4" name="team">
             <a:extLst xmlns:a="http://schemas.openxmlformats.org/drawingml/2006/main">
               <a:ext uri="{FF2B5EF4-FFF2-40B4-BE49-F238E27FC236}">
-                <a16:creationId xmlns:a16="http://schemas.microsoft.com/office/drawing/2014/main" id="{E5958D3A-D525-494D-BD3E-4E4896D2909D}"/>
+                <a16:creationId xmlns:a16="http://schemas.microsoft.com/office/drawing/2014/main" id="{B94CB470-57E5-41C4-BF45-429D82AD5267}"/>
               </a:ext>
             </a:extLst>
           </p:cNvPr>
@@ -2446,7 +2446,7 @@
                 <a:ea typeface="Arial"/>
                 <a:cs typeface="Arial"/>
               </a:rPr>
-              <a:t>Sapir Pirski</a:t>
+              <a:t>Menachem Twersky</a:t>
             </a:r>
           </a:p>
           <a:p xmlns:a="http://schemas.openxmlformats.org/drawingml/2006/main">
@@ -2469,7 +2469,7 @@
                 <a:ea typeface="Arial"/>
                 <a:cs typeface="Arial"/>
               </a:rPr>
-              <a:t>Contributor 2</a:t>
+              <a:t>Roni Reichbard</a:t>
             </a:r>
           </a:p>
           <a:p xmlns:a="http://schemas.openxmlformats.org/drawingml/2006/main">
@@ -2492,7 +2492,7 @@
                 <a:ea typeface="Arial"/>
                 <a:cs typeface="Arial"/>
               </a:rPr>
-              <a:t>Contributor 3</a:t>
+              <a:t>Sapir Pirski</a:t>
             </a:r>
           </a:p>
         </p:txBody>
@@ -2502,7 +2502,7 @@
           <p:cNvPr id="5" name="project-highlights">
             <a:extLst xmlns:a="http://schemas.openxmlformats.org/drawingml/2006/main">
               <a:ext uri="{FF2B5EF4-FFF2-40B4-BE49-F238E27FC236}">
-                <a16:creationId xmlns:a16="http://schemas.microsoft.com/office/drawing/2014/main" id="{46217732-90F7-4546-8D2C-4DEF9D2D59B2}"/>
+                <a16:creationId xmlns:a16="http://schemas.microsoft.com/office/drawing/2014/main" id="{DC6F3FAA-B7CA-4F61-9286-F6F5A1330D76}"/>
               </a:ext>
             </a:extLst>
           </p:cNvPr>
@@ -2581,7 +2581,7 @@
     </p:spTree>
     <p:extLst>
       <p:ext uri="{BB962C8B-B14F-4D97-AF65-F5344CB8AC3E}">
-        <p14:creationId xmlns:p14="http://schemas.microsoft.com/office/powerpoint/2010/main" val="1973379194"/>
+        <p14:creationId xmlns:p14="http://schemas.microsoft.com/office/powerpoint/2010/main" val="1336006921"/>
       </p:ext>
     </p:extLst>
   </p:cSld>
@@ -2612,7 +2612,7 @@
           <p:cNvPr id="21" name="slide-title">
             <a:extLst xmlns:a="http://schemas.openxmlformats.org/drawingml/2006/main">
               <a:ext uri="{FF2B5EF4-FFF2-40B4-BE49-F238E27FC236}">
-                <a16:creationId xmlns:a16="http://schemas.microsoft.com/office/drawing/2014/main" id="{97EDBEE1-897A-44C8-8853-4F7B0B36E956}"/>
+                <a16:creationId xmlns:a16="http://schemas.microsoft.com/office/drawing/2014/main" id="{1B302F1A-FAF1-4F08-8342-EE018FF96169}"/>
               </a:ext>
             </a:extLst>
           </p:cNvPr>
@@ -2670,7 +2670,7 @@
           <p:cNvPr id="2" name="">
             <a:extLst xmlns:a="http://schemas.openxmlformats.org/drawingml/2006/main">
               <a:ext uri="{FF2B5EF4-FFF2-40B4-BE49-F238E27FC236}">
-                <a16:creationId xmlns:a16="http://schemas.microsoft.com/office/drawing/2014/main" id="{5152FA58-AFAC-4A38-BCEF-70C9D730C70D}"/>
+                <a16:creationId xmlns:a16="http://schemas.microsoft.com/office/drawing/2014/main" id="{11EECE32-2CBB-4919-8D5B-481FDC7D00F8}"/>
               </a:ext>
             </a:extLst>
           </p:cNvPr>
@@ -2703,7 +2703,7 @@
           <p:cNvPr id="3" name="slide-number-10">
             <a:extLst xmlns:a="http://schemas.openxmlformats.org/drawingml/2006/main">
               <a:ext uri="{FF2B5EF4-FFF2-40B4-BE49-F238E27FC236}">
-                <a16:creationId xmlns:a16="http://schemas.microsoft.com/office/drawing/2014/main" id="{14121A6C-2C66-47F3-B189-932E96D7DD49}"/>
+                <a16:creationId xmlns:a16="http://schemas.microsoft.com/office/drawing/2014/main" id="{FE213406-00ED-451C-BA1C-39E607C7B220}"/>
               </a:ext>
             </a:extLst>
           </p:cNvPr>
@@ -2761,7 +2761,7 @@
           <p:cNvPr id="4" name="text">
             <a:extLst xmlns:a="http://schemas.openxmlformats.org/drawingml/2006/main">
               <a:ext uri="{FF2B5EF4-FFF2-40B4-BE49-F238E27FC236}">
-                <a16:creationId xmlns:a16="http://schemas.microsoft.com/office/drawing/2014/main" id="{7E692305-14CD-4334-9A58-8D2224C0AC0C}"/>
+                <a16:creationId xmlns:a16="http://schemas.microsoft.com/office/drawing/2014/main" id="{A0AF5C13-1E5C-4E9B-858A-D55F3EA2C7FB}"/>
               </a:ext>
             </a:extLst>
           </p:cNvPr>
@@ -2819,7 +2819,7 @@
           <p:cNvPr id="5" name="">
             <a:extLst xmlns:a="http://schemas.openxmlformats.org/drawingml/2006/main">
               <a:ext uri="{FF2B5EF4-FFF2-40B4-BE49-F238E27FC236}">
-                <a16:creationId xmlns:a16="http://schemas.microsoft.com/office/drawing/2014/main" id="{FAA161B5-24A7-4B2F-AD40-F641D7C2C525}"/>
+                <a16:creationId xmlns:a16="http://schemas.microsoft.com/office/drawing/2014/main" id="{AF4D735C-D3E4-4092-B063-A0D89E67F71C}"/>
               </a:ext>
             </a:extLst>
           </p:cNvPr>
@@ -2852,7 +2852,7 @@
           <p:cNvPr id="6" name="text">
             <a:extLst xmlns:a="http://schemas.openxmlformats.org/drawingml/2006/main">
               <a:ext uri="{FF2B5EF4-FFF2-40B4-BE49-F238E27FC236}">
-                <a16:creationId xmlns:a16="http://schemas.microsoft.com/office/drawing/2014/main" id="{A9E256FD-21D9-4865-B880-B7455F871A4D}"/>
+                <a16:creationId xmlns:a16="http://schemas.microsoft.com/office/drawing/2014/main" id="{2721FC6A-F3B2-4971-9694-79261220349F}"/>
               </a:ext>
             </a:extLst>
           </p:cNvPr>
@@ -2910,7 +2910,7 @@
           <p:cNvPr id="7" name="text">
             <a:extLst xmlns:a="http://schemas.openxmlformats.org/drawingml/2006/main">
               <a:ext uri="{FF2B5EF4-FFF2-40B4-BE49-F238E27FC236}">
-                <a16:creationId xmlns:a16="http://schemas.microsoft.com/office/drawing/2014/main" id="{127253D1-8D60-4516-95B4-DBE4F5530068}"/>
+                <a16:creationId xmlns:a16="http://schemas.microsoft.com/office/drawing/2014/main" id="{CD06AEE5-3CDB-4AE4-A262-E6D52EB5711F}"/>
               </a:ext>
             </a:extLst>
           </p:cNvPr>
@@ -2968,7 +2968,7 @@
           <p:cNvPr id="8" name="text">
             <a:extLst xmlns:a="http://schemas.openxmlformats.org/drawingml/2006/main">
               <a:ext uri="{FF2B5EF4-FFF2-40B4-BE49-F238E27FC236}">
-                <a16:creationId xmlns:a16="http://schemas.microsoft.com/office/drawing/2014/main" id="{82EDEB08-D2EE-4EC7-81CF-C861815645ED}"/>
+                <a16:creationId xmlns:a16="http://schemas.microsoft.com/office/drawing/2014/main" id="{980B85B4-AF9E-4C64-8B4D-2640B1C52155}"/>
               </a:ext>
             </a:extLst>
           </p:cNvPr>
@@ -3026,7 +3026,7 @@
           <p:cNvPr id="9" name="">
             <a:extLst xmlns:a="http://schemas.openxmlformats.org/drawingml/2006/main">
               <a:ext uri="{FF2B5EF4-FFF2-40B4-BE49-F238E27FC236}">
-                <a16:creationId xmlns:a16="http://schemas.microsoft.com/office/drawing/2014/main" id="{77849759-8DB3-43B5-A667-FF24E64D384A}"/>
+                <a16:creationId xmlns:a16="http://schemas.microsoft.com/office/drawing/2014/main" id="{E9E29790-8142-4765-B1DC-55FEFE1492B6}"/>
               </a:ext>
             </a:extLst>
           </p:cNvPr>
@@ -3059,7 +3059,7 @@
           <p:cNvPr id="10" name="text">
             <a:extLst xmlns:a="http://schemas.openxmlformats.org/drawingml/2006/main">
               <a:ext uri="{FF2B5EF4-FFF2-40B4-BE49-F238E27FC236}">
-                <a16:creationId xmlns:a16="http://schemas.microsoft.com/office/drawing/2014/main" id="{73636EF8-BEB1-4EC3-910F-4725FA544A85}"/>
+                <a16:creationId xmlns:a16="http://schemas.microsoft.com/office/drawing/2014/main" id="{74821481-9347-4601-A8D5-E3082A06CCE8}"/>
               </a:ext>
             </a:extLst>
           </p:cNvPr>
@@ -3117,7 +3117,7 @@
           <p:cNvPr id="11" name="text">
             <a:extLst xmlns:a="http://schemas.openxmlformats.org/drawingml/2006/main">
               <a:ext uri="{FF2B5EF4-FFF2-40B4-BE49-F238E27FC236}">
-                <a16:creationId xmlns:a16="http://schemas.microsoft.com/office/drawing/2014/main" id="{0C71C48C-689D-491D-B996-9BFE85E4C8D5}"/>
+                <a16:creationId xmlns:a16="http://schemas.microsoft.com/office/drawing/2014/main" id="{62E04F69-9E63-47AF-9B66-7F62847EAADD}"/>
               </a:ext>
             </a:extLst>
           </p:cNvPr>
@@ -3175,7 +3175,7 @@
           <p:cNvPr id="12" name="text">
             <a:extLst xmlns:a="http://schemas.openxmlformats.org/drawingml/2006/main">
               <a:ext uri="{FF2B5EF4-FFF2-40B4-BE49-F238E27FC236}">
-                <a16:creationId xmlns:a16="http://schemas.microsoft.com/office/drawing/2014/main" id="{783C8FA5-7536-453E-AA5A-E4FDE572100D}"/>
+                <a16:creationId xmlns:a16="http://schemas.microsoft.com/office/drawing/2014/main" id="{A6D30954-81BA-4AA8-B293-C3BE81EBD854}"/>
               </a:ext>
             </a:extLst>
           </p:cNvPr>
@@ -3233,7 +3233,7 @@
           <p:cNvPr id="13" name="">
             <a:extLst xmlns:a="http://schemas.openxmlformats.org/drawingml/2006/main">
               <a:ext uri="{FF2B5EF4-FFF2-40B4-BE49-F238E27FC236}">
-                <a16:creationId xmlns:a16="http://schemas.microsoft.com/office/drawing/2014/main" id="{A49E4A84-413C-4583-9DBC-6F793281ADE9}"/>
+                <a16:creationId xmlns:a16="http://schemas.microsoft.com/office/drawing/2014/main" id="{C5020A64-37B3-4D3E-96CF-BB9ED3A1C66C}"/>
               </a:ext>
             </a:extLst>
           </p:cNvPr>
@@ -3266,7 +3266,7 @@
           <p:cNvPr id="14" name="text">
             <a:extLst xmlns:a="http://schemas.openxmlformats.org/drawingml/2006/main">
               <a:ext uri="{FF2B5EF4-FFF2-40B4-BE49-F238E27FC236}">
-                <a16:creationId xmlns:a16="http://schemas.microsoft.com/office/drawing/2014/main" id="{80280AD0-7DBF-44EF-8203-D9372AEC676D}"/>
+                <a16:creationId xmlns:a16="http://schemas.microsoft.com/office/drawing/2014/main" id="{ADB538EE-2175-45F4-BFCB-4F876A526269}"/>
               </a:ext>
             </a:extLst>
           </p:cNvPr>
@@ -3324,7 +3324,7 @@
           <p:cNvPr id="15" name="text">
             <a:extLst xmlns:a="http://schemas.openxmlformats.org/drawingml/2006/main">
               <a:ext uri="{FF2B5EF4-FFF2-40B4-BE49-F238E27FC236}">
-                <a16:creationId xmlns:a16="http://schemas.microsoft.com/office/drawing/2014/main" id="{905C94C8-270A-414C-A0B1-E1A0BA39B0B7}"/>
+                <a16:creationId xmlns:a16="http://schemas.microsoft.com/office/drawing/2014/main" id="{44429E13-A68F-4F68-B65C-4D9EE1C0B27D}"/>
               </a:ext>
             </a:extLst>
           </p:cNvPr>
@@ -3382,7 +3382,7 @@
           <p:cNvPr id="16" name="text">
             <a:extLst xmlns:a="http://schemas.openxmlformats.org/drawingml/2006/main">
               <a:ext uri="{FF2B5EF4-FFF2-40B4-BE49-F238E27FC236}">
-                <a16:creationId xmlns:a16="http://schemas.microsoft.com/office/drawing/2014/main" id="{B539DDBB-C78C-408D-BC6D-D53102A2DEED}"/>
+                <a16:creationId xmlns:a16="http://schemas.microsoft.com/office/drawing/2014/main" id="{010F9560-C473-4F4D-BB7D-23D629FB1D92}"/>
               </a:ext>
             </a:extLst>
           </p:cNvPr>
@@ -3440,7 +3440,7 @@
           <p:cNvPr id="17" name="">
             <a:extLst xmlns:a="http://schemas.openxmlformats.org/drawingml/2006/main">
               <a:ext uri="{FF2B5EF4-FFF2-40B4-BE49-F238E27FC236}">
-                <a16:creationId xmlns:a16="http://schemas.microsoft.com/office/drawing/2014/main" id="{82B978C0-EE5E-45CE-8326-E43B4DF37B75}"/>
+                <a16:creationId xmlns:a16="http://schemas.microsoft.com/office/drawing/2014/main" id="{F95F4CED-C1AD-4FC6-BE20-B078604061C5}"/>
               </a:ext>
             </a:extLst>
           </p:cNvPr>
@@ -3473,7 +3473,7 @@
           <p:cNvPr id="18" name="text">
             <a:extLst xmlns:a="http://schemas.openxmlformats.org/drawingml/2006/main">
               <a:ext uri="{FF2B5EF4-FFF2-40B4-BE49-F238E27FC236}">
-                <a16:creationId xmlns:a16="http://schemas.microsoft.com/office/drawing/2014/main" id="{DB9CB741-5A1A-4543-B1A8-1886776F2C15}"/>
+                <a16:creationId xmlns:a16="http://schemas.microsoft.com/office/drawing/2014/main" id="{7460D7C2-D47A-4CD0-8C46-07E51AAD909E}"/>
               </a:ext>
             </a:extLst>
           </p:cNvPr>
@@ -3531,7 +3531,7 @@
           <p:cNvPr id="19" name="text">
             <a:extLst xmlns:a="http://schemas.openxmlformats.org/drawingml/2006/main">
               <a:ext uri="{FF2B5EF4-FFF2-40B4-BE49-F238E27FC236}">
-                <a16:creationId xmlns:a16="http://schemas.microsoft.com/office/drawing/2014/main" id="{55E806F7-778A-4CFD-A2BB-B7AAC9FC6E2B}"/>
+                <a16:creationId xmlns:a16="http://schemas.microsoft.com/office/drawing/2014/main" id="{606FD0A2-4F50-441F-9EDC-1591443404E0}"/>
               </a:ext>
             </a:extLst>
           </p:cNvPr>
@@ -3589,7 +3589,7 @@
           <p:cNvPr id="20" name="text">
             <a:extLst xmlns:a="http://schemas.openxmlformats.org/drawingml/2006/main">
               <a:ext uri="{FF2B5EF4-FFF2-40B4-BE49-F238E27FC236}">
-                <a16:creationId xmlns:a16="http://schemas.microsoft.com/office/drawing/2014/main" id="{D1438718-BD2B-4D44-8C59-2ED0F2E49FE8}"/>
+                <a16:creationId xmlns:a16="http://schemas.microsoft.com/office/drawing/2014/main" id="{0BF1AA91-3875-43C1-925D-DB1ACB571B59}"/>
               </a:ext>
             </a:extLst>
           </p:cNvPr>
@@ -3645,7 +3645,7 @@
     </p:spTree>
     <p:extLst>
       <p:ext uri="{BB962C8B-B14F-4D97-AF65-F5344CB8AC3E}">
-        <p14:creationId xmlns:p14="http://schemas.microsoft.com/office/powerpoint/2010/main" val="1805486752"/>
+        <p14:creationId xmlns:p14="http://schemas.microsoft.com/office/powerpoint/2010/main" val="1178407632"/>
       </p:ext>
     </p:extLst>
   </p:cSld>
@@ -3676,7 +3676,7 @@
           <p:cNvPr id="9" name="slide-title">
             <a:extLst xmlns:a="http://schemas.openxmlformats.org/drawingml/2006/main">
               <a:ext uri="{FF2B5EF4-FFF2-40B4-BE49-F238E27FC236}">
-                <a16:creationId xmlns:a16="http://schemas.microsoft.com/office/drawing/2014/main" id="{142D67C6-1F97-4C86-B34B-049593A39E92}"/>
+                <a16:creationId xmlns:a16="http://schemas.microsoft.com/office/drawing/2014/main" id="{E04E2BD5-D49E-44D7-9B84-A1BEEE839880}"/>
               </a:ext>
             </a:extLst>
           </p:cNvPr>
@@ -3734,7 +3734,7 @@
           <p:cNvPr id="2" name="">
             <a:extLst xmlns:a="http://schemas.openxmlformats.org/drawingml/2006/main">
               <a:ext uri="{FF2B5EF4-FFF2-40B4-BE49-F238E27FC236}">
-                <a16:creationId xmlns:a16="http://schemas.microsoft.com/office/drawing/2014/main" id="{8629E26E-2FF5-4F30-A21F-9B4E467D77BD}"/>
+                <a16:creationId xmlns:a16="http://schemas.microsoft.com/office/drawing/2014/main" id="{4645F108-1E66-4418-B514-3FB7E49CA1A0}"/>
               </a:ext>
             </a:extLst>
           </p:cNvPr>
@@ -3767,7 +3767,7 @@
           <p:cNvPr id="3" name="slide-number-11">
             <a:extLst xmlns:a="http://schemas.openxmlformats.org/drawingml/2006/main">
               <a:ext uri="{FF2B5EF4-FFF2-40B4-BE49-F238E27FC236}">
-                <a16:creationId xmlns:a16="http://schemas.microsoft.com/office/drawing/2014/main" id="{489836DA-7863-4E38-836C-A5D4514068CA}"/>
+                <a16:creationId xmlns:a16="http://schemas.microsoft.com/office/drawing/2014/main" id="{9DB42BB1-0E4D-4966-BC3E-D164D19CCD84}"/>
               </a:ext>
             </a:extLst>
           </p:cNvPr>
@@ -3829,7 +3829,7 @@
           <p:nvPr/>
         </p:nvPicPr>
         <p:blipFill>
-          <a:blip xmlns:r="http://schemas.openxmlformats.org/officeDocument/2006/relationships" xmlns:a="http://schemas.openxmlformats.org/drawingml/2006/main" r:embed="R5002f8e72d5545c7"/>
+          <a:blip xmlns:r="http://schemas.openxmlformats.org/officeDocument/2006/relationships" xmlns:a="http://schemas.openxmlformats.org/drawingml/2006/main" r:embed="Rdbd726bdd0f14995"/>
           <a:stretch xmlns:a="http://schemas.openxmlformats.org/drawingml/2006/main"/>
         </p:blipFill>
         <p:spPr>
@@ -3847,7 +3847,7 @@
           <p:cNvPr id="5" name="text">
             <a:extLst xmlns:a="http://schemas.openxmlformats.org/drawingml/2006/main">
               <a:ext uri="{FF2B5EF4-FFF2-40B4-BE49-F238E27FC236}">
-                <a16:creationId xmlns:a16="http://schemas.microsoft.com/office/drawing/2014/main" id="{24D31C68-3396-4D4B-93CB-4CC38A69F385}"/>
+                <a16:creationId xmlns:a16="http://schemas.microsoft.com/office/drawing/2014/main" id="{F5C600B8-82FF-4459-942B-2C2265E2FD1F}"/>
               </a:ext>
             </a:extLst>
           </p:cNvPr>
@@ -3905,7 +3905,7 @@
           <p:cNvPr id="6" name="text">
             <a:extLst xmlns:a="http://schemas.openxmlformats.org/drawingml/2006/main">
               <a:ext uri="{FF2B5EF4-FFF2-40B4-BE49-F238E27FC236}">
-                <a16:creationId xmlns:a16="http://schemas.microsoft.com/office/drawing/2014/main" id="{DD15358B-2DF0-4134-9FAB-B7F3D1E1FC39}"/>
+                <a16:creationId xmlns:a16="http://schemas.microsoft.com/office/drawing/2014/main" id="{E8EA0980-C91F-4DDF-B6BC-862A4C4C064B}"/>
               </a:ext>
             </a:extLst>
           </p:cNvPr>
@@ -4009,7 +4009,7 @@
           <p:cNvPr id="7" name="text">
             <a:extLst xmlns:a="http://schemas.openxmlformats.org/drawingml/2006/main">
               <a:ext uri="{FF2B5EF4-FFF2-40B4-BE49-F238E27FC236}">
-                <a16:creationId xmlns:a16="http://schemas.microsoft.com/office/drawing/2014/main" id="{038CC6CB-1B9C-4C75-957D-EC1AE2895EA3}"/>
+                <a16:creationId xmlns:a16="http://schemas.microsoft.com/office/drawing/2014/main" id="{E1618A4D-9D3F-4F8B-A71C-71C64BE57302}"/>
               </a:ext>
             </a:extLst>
           </p:cNvPr>
@@ -4067,7 +4067,7 @@
           <p:cNvPr id="8" name="text">
             <a:extLst xmlns:a="http://schemas.openxmlformats.org/drawingml/2006/main">
               <a:ext uri="{FF2B5EF4-FFF2-40B4-BE49-F238E27FC236}">
-                <a16:creationId xmlns:a16="http://schemas.microsoft.com/office/drawing/2014/main" id="{DB8C63B7-D658-4D32-A2D0-50823D47B1FA}"/>
+                <a16:creationId xmlns:a16="http://schemas.microsoft.com/office/drawing/2014/main" id="{B6C0DBCF-3CA6-4FF2-833B-4BA7C47DB72D}"/>
               </a:ext>
             </a:extLst>
           </p:cNvPr>
@@ -4123,7 +4123,7 @@
     </p:spTree>
     <p:extLst>
       <p:ext uri="{BB962C8B-B14F-4D97-AF65-F5344CB8AC3E}">
-        <p14:creationId xmlns:p14="http://schemas.microsoft.com/office/powerpoint/2010/main" val="189337680"/>
+        <p14:creationId xmlns:p14="http://schemas.microsoft.com/office/powerpoint/2010/main" val="2142630628"/>
       </p:ext>
     </p:extLst>
   </p:cSld>
@@ -4154,7 +4154,7 @@
           <p:cNvPr id="7" name="slide-title">
             <a:extLst xmlns:a="http://schemas.openxmlformats.org/drawingml/2006/main">
               <a:ext uri="{FF2B5EF4-FFF2-40B4-BE49-F238E27FC236}">
-                <a16:creationId xmlns:a16="http://schemas.microsoft.com/office/drawing/2014/main" id="{C0068BEA-5195-4315-8788-E4340CBE2F9A}"/>
+                <a16:creationId xmlns:a16="http://schemas.microsoft.com/office/drawing/2014/main" id="{2616C5E1-CFB2-437F-A65A-F6872908539D}"/>
               </a:ext>
             </a:extLst>
           </p:cNvPr>
@@ -4212,7 +4212,7 @@
           <p:cNvPr id="2" name="">
             <a:extLst xmlns:a="http://schemas.openxmlformats.org/drawingml/2006/main">
               <a:ext uri="{FF2B5EF4-FFF2-40B4-BE49-F238E27FC236}">
-                <a16:creationId xmlns:a16="http://schemas.microsoft.com/office/drawing/2014/main" id="{B288B153-F578-4275-B51C-ED4AA7BD823D}"/>
+                <a16:creationId xmlns:a16="http://schemas.microsoft.com/office/drawing/2014/main" id="{A775E24B-5E31-40E9-9E6D-66EF3B4380AE}"/>
               </a:ext>
             </a:extLst>
           </p:cNvPr>
@@ -4245,7 +4245,7 @@
           <p:cNvPr id="3" name="slide-number-12">
             <a:extLst xmlns:a="http://schemas.openxmlformats.org/drawingml/2006/main">
               <a:ext uri="{FF2B5EF4-FFF2-40B4-BE49-F238E27FC236}">
-                <a16:creationId xmlns:a16="http://schemas.microsoft.com/office/drawing/2014/main" id="{33511F62-279B-40FE-A0DB-50E0C05E9483}"/>
+                <a16:creationId xmlns:a16="http://schemas.microsoft.com/office/drawing/2014/main" id="{306B6E18-278F-46F6-930F-92C979D0C486}"/>
               </a:ext>
             </a:extLst>
           </p:cNvPr>
@@ -4307,7 +4307,7 @@
           <p:nvPr/>
         </p:nvPicPr>
         <p:blipFill>
-          <a:blip xmlns:r="http://schemas.openxmlformats.org/officeDocument/2006/relationships" xmlns:a="http://schemas.openxmlformats.org/drawingml/2006/main" r:embed="R7090c8c203f34293"/>
+          <a:blip xmlns:r="http://schemas.openxmlformats.org/officeDocument/2006/relationships" xmlns:a="http://schemas.openxmlformats.org/drawingml/2006/main" r:embed="Rb71b72d49a9f4f61"/>
           <a:stretch xmlns:a="http://schemas.openxmlformats.org/drawingml/2006/main"/>
         </p:blipFill>
         <p:spPr>
@@ -4329,7 +4329,7 @@
           <p:nvPr/>
         </p:nvPicPr>
         <p:blipFill>
-          <a:blip xmlns:r="http://schemas.openxmlformats.org/officeDocument/2006/relationships" xmlns:a="http://schemas.openxmlformats.org/drawingml/2006/main" r:embed="R5f3d92952fc9420c"/>
+          <a:blip xmlns:r="http://schemas.openxmlformats.org/officeDocument/2006/relationships" xmlns:a="http://schemas.openxmlformats.org/drawingml/2006/main" r:embed="R9b2620fd80674ece"/>
           <a:stretch xmlns:a="http://schemas.openxmlformats.org/drawingml/2006/main"/>
         </p:blipFill>
         <p:spPr>
@@ -4347,7 +4347,7 @@
           <p:cNvPr id="6" name="text">
             <a:extLst xmlns:a="http://schemas.openxmlformats.org/drawingml/2006/main">
               <a:ext uri="{FF2B5EF4-FFF2-40B4-BE49-F238E27FC236}">
-                <a16:creationId xmlns:a16="http://schemas.microsoft.com/office/drawing/2014/main" id="{D9DCFBB7-4022-43DE-B843-5C3CACF3D88E}"/>
+                <a16:creationId xmlns:a16="http://schemas.microsoft.com/office/drawing/2014/main" id="{A193F11E-09EA-4A13-B9F2-5AF6361C6E56}"/>
               </a:ext>
             </a:extLst>
           </p:cNvPr>
@@ -4403,7 +4403,7 @@
     </p:spTree>
     <p:extLst>
       <p:ext uri="{BB962C8B-B14F-4D97-AF65-F5344CB8AC3E}">
-        <p14:creationId xmlns:p14="http://schemas.microsoft.com/office/powerpoint/2010/main" val="1445131885"/>
+        <p14:creationId xmlns:p14="http://schemas.microsoft.com/office/powerpoint/2010/main" val="1085535729"/>
       </p:ext>
     </p:extLst>
   </p:cSld>
@@ -4434,7 +4434,7 @@
           <p:cNvPr id="9" name="slide-title">
             <a:extLst xmlns:a="http://schemas.openxmlformats.org/drawingml/2006/main">
               <a:ext uri="{FF2B5EF4-FFF2-40B4-BE49-F238E27FC236}">
-                <a16:creationId xmlns:a16="http://schemas.microsoft.com/office/drawing/2014/main" id="{8DA53927-A6C3-4E40-9685-543FF25B7239}"/>
+                <a16:creationId xmlns:a16="http://schemas.microsoft.com/office/drawing/2014/main" id="{00F8618D-915B-411B-9668-DCB9218B021A}"/>
               </a:ext>
             </a:extLst>
           </p:cNvPr>
@@ -4492,7 +4492,7 @@
           <p:cNvPr id="2" name="">
             <a:extLst xmlns:a="http://schemas.openxmlformats.org/drawingml/2006/main">
               <a:ext uri="{FF2B5EF4-FFF2-40B4-BE49-F238E27FC236}">
-                <a16:creationId xmlns:a16="http://schemas.microsoft.com/office/drawing/2014/main" id="{B85AB995-1AC1-4FA6-986F-2197BBC38B46}"/>
+                <a16:creationId xmlns:a16="http://schemas.microsoft.com/office/drawing/2014/main" id="{29DEE704-423E-468D-81A2-24B434FA8F59}"/>
               </a:ext>
             </a:extLst>
           </p:cNvPr>
@@ -4525,7 +4525,7 @@
           <p:cNvPr id="3" name="slide-number-13">
             <a:extLst xmlns:a="http://schemas.openxmlformats.org/drawingml/2006/main">
               <a:ext uri="{FF2B5EF4-FFF2-40B4-BE49-F238E27FC236}">
-                <a16:creationId xmlns:a16="http://schemas.microsoft.com/office/drawing/2014/main" id="{544137FE-8991-40E8-8FAF-7A97F3D5D805}"/>
+                <a16:creationId xmlns:a16="http://schemas.microsoft.com/office/drawing/2014/main" id="{D5116CB6-9EE1-4E9A-BD68-65E0A35B24A1}"/>
               </a:ext>
             </a:extLst>
           </p:cNvPr>
@@ -4587,7 +4587,7 @@
           <p:nvPr/>
         </p:nvPicPr>
         <p:blipFill>
-          <a:blip xmlns:r="http://schemas.openxmlformats.org/officeDocument/2006/relationships" xmlns:a="http://schemas.openxmlformats.org/drawingml/2006/main" r:embed="R6ee39d2b605b47a9"/>
+          <a:blip xmlns:r="http://schemas.openxmlformats.org/officeDocument/2006/relationships" xmlns:a="http://schemas.openxmlformats.org/drawingml/2006/main" r:embed="R73b055a1e3394396"/>
           <a:stretch xmlns:a="http://schemas.openxmlformats.org/drawingml/2006/main"/>
         </p:blipFill>
         <p:spPr>
@@ -4605,7 +4605,7 @@
           <p:cNvPr id="5" name="text">
             <a:extLst xmlns:a="http://schemas.openxmlformats.org/drawingml/2006/main">
               <a:ext uri="{FF2B5EF4-FFF2-40B4-BE49-F238E27FC236}">
-                <a16:creationId xmlns:a16="http://schemas.microsoft.com/office/drawing/2014/main" id="{0365C0D7-A657-4EE1-AA8C-36853577132C}"/>
+                <a16:creationId xmlns:a16="http://schemas.microsoft.com/office/drawing/2014/main" id="{4D97105C-9A6E-4F32-8E80-6D23CCEBCA16}"/>
               </a:ext>
             </a:extLst>
           </p:cNvPr>
@@ -4663,7 +4663,7 @@
           <p:cNvPr id="6" name="text">
             <a:extLst xmlns:a="http://schemas.openxmlformats.org/drawingml/2006/main">
               <a:ext uri="{FF2B5EF4-FFF2-40B4-BE49-F238E27FC236}">
-                <a16:creationId xmlns:a16="http://schemas.microsoft.com/office/drawing/2014/main" id="{0E7A91BE-F02B-4B3F-B327-4739761A9AED}"/>
+                <a16:creationId xmlns:a16="http://schemas.microsoft.com/office/drawing/2014/main" id="{54E3AD1A-F52F-4A12-8EC8-495E9C3387CB}"/>
               </a:ext>
             </a:extLst>
           </p:cNvPr>
@@ -4790,7 +4790,7 @@
           <p:cNvPr id="7" name="text">
             <a:extLst xmlns:a="http://schemas.openxmlformats.org/drawingml/2006/main">
               <a:ext uri="{FF2B5EF4-FFF2-40B4-BE49-F238E27FC236}">
-                <a16:creationId xmlns:a16="http://schemas.microsoft.com/office/drawing/2014/main" id="{8B904D9A-CCD7-40E5-A8A4-CF29BD975F56}"/>
+                <a16:creationId xmlns:a16="http://schemas.microsoft.com/office/drawing/2014/main" id="{835683A4-C37E-467A-A1CE-8DD21CAF5346}"/>
               </a:ext>
             </a:extLst>
           </p:cNvPr>
@@ -4848,7 +4848,7 @@
           <p:cNvPr id="8" name="text">
             <a:extLst xmlns:a="http://schemas.openxmlformats.org/drawingml/2006/main">
               <a:ext uri="{FF2B5EF4-FFF2-40B4-BE49-F238E27FC236}">
-                <a16:creationId xmlns:a16="http://schemas.microsoft.com/office/drawing/2014/main" id="{84549882-B3C4-4619-A1D6-97C672F1F8FC}"/>
+                <a16:creationId xmlns:a16="http://schemas.microsoft.com/office/drawing/2014/main" id="{5780D990-1DC8-44D2-899C-0BB2ED999F03}"/>
               </a:ext>
             </a:extLst>
           </p:cNvPr>
@@ -4904,7 +4904,7 @@
     </p:spTree>
     <p:extLst>
       <p:ext uri="{BB962C8B-B14F-4D97-AF65-F5344CB8AC3E}">
-        <p14:creationId xmlns:p14="http://schemas.microsoft.com/office/powerpoint/2010/main" val="794943715"/>
+        <p14:creationId xmlns:p14="http://schemas.microsoft.com/office/powerpoint/2010/main" val="2045441420"/>
       </p:ext>
     </p:extLst>
   </p:cSld>
@@ -4935,7 +4935,7 @@
           <p:cNvPr id="22" name="slide-title">
             <a:extLst xmlns:a="http://schemas.openxmlformats.org/drawingml/2006/main">
               <a:ext uri="{FF2B5EF4-FFF2-40B4-BE49-F238E27FC236}">
-                <a16:creationId xmlns:a16="http://schemas.microsoft.com/office/drawing/2014/main" id="{E30078A6-3F34-45A2-BC94-868B57A1CACA}"/>
+                <a16:creationId xmlns:a16="http://schemas.microsoft.com/office/drawing/2014/main" id="{91F4432D-0825-4283-92FB-8C30F3C6BBF9}"/>
               </a:ext>
             </a:extLst>
           </p:cNvPr>
@@ -4993,7 +4993,7 @@
           <p:cNvPr id="2" name="">
             <a:extLst xmlns:a="http://schemas.openxmlformats.org/drawingml/2006/main">
               <a:ext uri="{FF2B5EF4-FFF2-40B4-BE49-F238E27FC236}">
-                <a16:creationId xmlns:a16="http://schemas.microsoft.com/office/drawing/2014/main" id="{E766F38D-8C4E-4F0C-BD27-7F27255BDD6B}"/>
+                <a16:creationId xmlns:a16="http://schemas.microsoft.com/office/drawing/2014/main" id="{1A4E36D2-9FAE-4713-A296-3783D2A6DB74}"/>
               </a:ext>
             </a:extLst>
           </p:cNvPr>
@@ -5026,7 +5026,7 @@
           <p:cNvPr id="3" name="slide-number-14">
             <a:extLst xmlns:a="http://schemas.openxmlformats.org/drawingml/2006/main">
               <a:ext uri="{FF2B5EF4-FFF2-40B4-BE49-F238E27FC236}">
-                <a16:creationId xmlns:a16="http://schemas.microsoft.com/office/drawing/2014/main" id="{C4EC0EFB-E3C2-411F-B689-ABB376468BE2}"/>
+                <a16:creationId xmlns:a16="http://schemas.microsoft.com/office/drawing/2014/main" id="{1EE8E98C-4252-4547-A807-82AE37CB49E8}"/>
               </a:ext>
             </a:extLst>
           </p:cNvPr>
@@ -5088,7 +5088,7 @@
           <p:nvPr/>
         </p:nvPicPr>
         <p:blipFill>
-          <a:blip xmlns:r="http://schemas.openxmlformats.org/officeDocument/2006/relationships" xmlns:a="http://schemas.openxmlformats.org/drawingml/2006/main" r:embed="R7a12d2110f584580"/>
+          <a:blip xmlns:r="http://schemas.openxmlformats.org/officeDocument/2006/relationships" xmlns:a="http://schemas.openxmlformats.org/drawingml/2006/main" r:embed="R6238b5f019b24d47"/>
           <a:stretch xmlns:a="http://schemas.openxmlformats.org/drawingml/2006/main"/>
         </p:blipFill>
         <p:spPr>
@@ -5106,7 +5106,7 @@
           <p:cNvPr id="5" name="">
             <a:extLst xmlns:a="http://schemas.openxmlformats.org/drawingml/2006/main">
               <a:ext uri="{FF2B5EF4-FFF2-40B4-BE49-F238E27FC236}">
-                <a16:creationId xmlns:a16="http://schemas.microsoft.com/office/drawing/2014/main" id="{99D25709-47AA-4498-AC9B-7D8C3E0B3A2B}"/>
+                <a16:creationId xmlns:a16="http://schemas.microsoft.com/office/drawing/2014/main" id="{A7FF5604-7428-43F4-972F-02CCF9DBEADD}"/>
               </a:ext>
             </a:extLst>
           </p:cNvPr>
@@ -5139,7 +5139,7 @@
           <p:cNvPr id="6" name="text">
             <a:extLst xmlns:a="http://schemas.openxmlformats.org/drawingml/2006/main">
               <a:ext uri="{FF2B5EF4-FFF2-40B4-BE49-F238E27FC236}">
-                <a16:creationId xmlns:a16="http://schemas.microsoft.com/office/drawing/2014/main" id="{82B0A326-DE71-4630-AC25-D2F49C3A5896}"/>
+                <a16:creationId xmlns:a16="http://schemas.microsoft.com/office/drawing/2014/main" id="{68A255C1-09F2-4EB1-B414-55DCDCF36746}"/>
               </a:ext>
             </a:extLst>
           </p:cNvPr>
@@ -5197,7 +5197,7 @@
           <p:cNvPr id="7" name="text">
             <a:extLst xmlns:a="http://schemas.openxmlformats.org/drawingml/2006/main">
               <a:ext uri="{FF2B5EF4-FFF2-40B4-BE49-F238E27FC236}">
-                <a16:creationId xmlns:a16="http://schemas.microsoft.com/office/drawing/2014/main" id="{D52E4119-C7D7-4EF0-89FC-8A19EEBFEDA7}"/>
+                <a16:creationId xmlns:a16="http://schemas.microsoft.com/office/drawing/2014/main" id="{4F1C22B9-8B70-42C4-AAA7-92F38AF96C30}"/>
               </a:ext>
             </a:extLst>
           </p:cNvPr>
@@ -5255,7 +5255,7 @@
           <p:cNvPr id="8" name="text">
             <a:extLst xmlns:a="http://schemas.openxmlformats.org/drawingml/2006/main">
               <a:ext uri="{FF2B5EF4-FFF2-40B4-BE49-F238E27FC236}">
-                <a16:creationId xmlns:a16="http://schemas.microsoft.com/office/drawing/2014/main" id="{898BA9D3-58E6-41C4-B1F9-EC751DBF3ED1}"/>
+                <a16:creationId xmlns:a16="http://schemas.microsoft.com/office/drawing/2014/main" id="{445F5DD1-7258-4E70-A2C3-2A8666A44E9C}"/>
               </a:ext>
             </a:extLst>
           </p:cNvPr>
@@ -5313,7 +5313,7 @@
           <p:cNvPr id="9" name="">
             <a:extLst xmlns:a="http://schemas.openxmlformats.org/drawingml/2006/main">
               <a:ext uri="{FF2B5EF4-FFF2-40B4-BE49-F238E27FC236}">
-                <a16:creationId xmlns:a16="http://schemas.microsoft.com/office/drawing/2014/main" id="{9F9811BE-7DD4-4A55-B23B-3EC39858A399}"/>
+                <a16:creationId xmlns:a16="http://schemas.microsoft.com/office/drawing/2014/main" id="{3D65B8F4-967C-4626-ACDB-49317E9F6CAB}"/>
               </a:ext>
             </a:extLst>
           </p:cNvPr>
@@ -5346,7 +5346,7 @@
           <p:cNvPr id="10" name="text">
             <a:extLst xmlns:a="http://schemas.openxmlformats.org/drawingml/2006/main">
               <a:ext uri="{FF2B5EF4-FFF2-40B4-BE49-F238E27FC236}">
-                <a16:creationId xmlns:a16="http://schemas.microsoft.com/office/drawing/2014/main" id="{9A61D30E-2F8D-42E1-9224-D56D1BF085D5}"/>
+                <a16:creationId xmlns:a16="http://schemas.microsoft.com/office/drawing/2014/main" id="{AB694777-A485-4D5F-8EFD-4A9C737F9571}"/>
               </a:ext>
             </a:extLst>
           </p:cNvPr>
@@ -5404,7 +5404,7 @@
           <p:cNvPr id="11" name="text">
             <a:extLst xmlns:a="http://schemas.openxmlformats.org/drawingml/2006/main">
               <a:ext uri="{FF2B5EF4-FFF2-40B4-BE49-F238E27FC236}">
-                <a16:creationId xmlns:a16="http://schemas.microsoft.com/office/drawing/2014/main" id="{6FC3F38A-DF67-486E-B7EB-8CFF513787A1}"/>
+                <a16:creationId xmlns:a16="http://schemas.microsoft.com/office/drawing/2014/main" id="{6D59890E-8572-4EB9-AE86-B49E40E001A9}"/>
               </a:ext>
             </a:extLst>
           </p:cNvPr>
@@ -5462,7 +5462,7 @@
           <p:cNvPr id="12" name="text">
             <a:extLst xmlns:a="http://schemas.openxmlformats.org/drawingml/2006/main">
               <a:ext uri="{FF2B5EF4-FFF2-40B4-BE49-F238E27FC236}">
-                <a16:creationId xmlns:a16="http://schemas.microsoft.com/office/drawing/2014/main" id="{20B27001-076D-4BA3-8E7E-9CB94B75C6E5}"/>
+                <a16:creationId xmlns:a16="http://schemas.microsoft.com/office/drawing/2014/main" id="{85B2CD40-4867-4787-84A5-D08ECFE51A02}"/>
               </a:ext>
             </a:extLst>
           </p:cNvPr>
@@ -5520,7 +5520,7 @@
           <p:cNvPr id="13" name="">
             <a:extLst xmlns:a="http://schemas.openxmlformats.org/drawingml/2006/main">
               <a:ext uri="{FF2B5EF4-FFF2-40B4-BE49-F238E27FC236}">
-                <a16:creationId xmlns:a16="http://schemas.microsoft.com/office/drawing/2014/main" id="{89B4089B-B499-4343-8E5A-9B33B6461B3E}"/>
+                <a16:creationId xmlns:a16="http://schemas.microsoft.com/office/drawing/2014/main" id="{DFF29CB9-391F-474C-800C-3CE0494B16FC}"/>
               </a:ext>
             </a:extLst>
           </p:cNvPr>
@@ -5553,7 +5553,7 @@
           <p:cNvPr id="14" name="text">
             <a:extLst xmlns:a="http://schemas.openxmlformats.org/drawingml/2006/main">
               <a:ext uri="{FF2B5EF4-FFF2-40B4-BE49-F238E27FC236}">
-                <a16:creationId xmlns:a16="http://schemas.microsoft.com/office/drawing/2014/main" id="{718BC1D0-A91A-455F-A58A-821EB3CB0450}"/>
+                <a16:creationId xmlns:a16="http://schemas.microsoft.com/office/drawing/2014/main" id="{AB92D875-CBDE-42D8-A88B-07A550E621CA}"/>
               </a:ext>
             </a:extLst>
           </p:cNvPr>
@@ -5611,7 +5611,7 @@
           <p:cNvPr id="15" name="text">
             <a:extLst xmlns:a="http://schemas.openxmlformats.org/drawingml/2006/main">
               <a:ext uri="{FF2B5EF4-FFF2-40B4-BE49-F238E27FC236}">
-                <a16:creationId xmlns:a16="http://schemas.microsoft.com/office/drawing/2014/main" id="{5591D311-5172-4047-9C48-064EBC140077}"/>
+                <a16:creationId xmlns:a16="http://schemas.microsoft.com/office/drawing/2014/main" id="{4357F89D-395C-4C94-B452-15B9CC2DCA25}"/>
               </a:ext>
             </a:extLst>
           </p:cNvPr>
@@ -5669,7 +5669,7 @@
           <p:cNvPr id="16" name="text">
             <a:extLst xmlns:a="http://schemas.openxmlformats.org/drawingml/2006/main">
               <a:ext uri="{FF2B5EF4-FFF2-40B4-BE49-F238E27FC236}">
-                <a16:creationId xmlns:a16="http://schemas.microsoft.com/office/drawing/2014/main" id="{01B22EA8-85FB-4499-AEA9-7239335A8863}"/>
+                <a16:creationId xmlns:a16="http://schemas.microsoft.com/office/drawing/2014/main" id="{3A2767E6-437C-4794-B470-15261A8CDF8B}"/>
               </a:ext>
             </a:extLst>
           </p:cNvPr>
@@ -5727,7 +5727,7 @@
           <p:cNvPr id="17" name="">
             <a:extLst xmlns:a="http://schemas.openxmlformats.org/drawingml/2006/main">
               <a:ext uri="{FF2B5EF4-FFF2-40B4-BE49-F238E27FC236}">
-                <a16:creationId xmlns:a16="http://schemas.microsoft.com/office/drawing/2014/main" id="{16A2260B-369D-4A68-A1ED-9E83C4251091}"/>
+                <a16:creationId xmlns:a16="http://schemas.microsoft.com/office/drawing/2014/main" id="{E4E0C70B-4807-4A46-99D8-C57936E429D3}"/>
               </a:ext>
             </a:extLst>
           </p:cNvPr>
@@ -5760,7 +5760,7 @@
           <p:cNvPr id="18" name="text">
             <a:extLst xmlns:a="http://schemas.openxmlformats.org/drawingml/2006/main">
               <a:ext uri="{FF2B5EF4-FFF2-40B4-BE49-F238E27FC236}">
-                <a16:creationId xmlns:a16="http://schemas.microsoft.com/office/drawing/2014/main" id="{8F87D71F-46E2-4877-9C3F-5ACD8C9FF8A8}"/>
+                <a16:creationId xmlns:a16="http://schemas.microsoft.com/office/drawing/2014/main" id="{FF49D847-02E7-4E27-9BAB-ACCE2521E7A5}"/>
               </a:ext>
             </a:extLst>
           </p:cNvPr>
@@ -5818,7 +5818,7 @@
           <p:cNvPr id="19" name="text">
             <a:extLst xmlns:a="http://schemas.openxmlformats.org/drawingml/2006/main">
               <a:ext uri="{FF2B5EF4-FFF2-40B4-BE49-F238E27FC236}">
-                <a16:creationId xmlns:a16="http://schemas.microsoft.com/office/drawing/2014/main" id="{3CB9FF0D-2485-420E-98D0-D98EE4D5CE2C}"/>
+                <a16:creationId xmlns:a16="http://schemas.microsoft.com/office/drawing/2014/main" id="{72ACDCC7-CE0E-4D34-A34C-78D642B5F39D}"/>
               </a:ext>
             </a:extLst>
           </p:cNvPr>
@@ -5876,7 +5876,7 @@
           <p:cNvPr id="20" name="text">
             <a:extLst xmlns:a="http://schemas.openxmlformats.org/drawingml/2006/main">
               <a:ext uri="{FF2B5EF4-FFF2-40B4-BE49-F238E27FC236}">
-                <a16:creationId xmlns:a16="http://schemas.microsoft.com/office/drawing/2014/main" id="{CBE39257-6F80-4B5F-BBD5-79165E2C3231}"/>
+                <a16:creationId xmlns:a16="http://schemas.microsoft.com/office/drawing/2014/main" id="{AE53DB07-79B5-42B2-98F2-413D7B20200A}"/>
               </a:ext>
             </a:extLst>
           </p:cNvPr>
@@ -5934,7 +5934,7 @@
           <p:cNvPr id="21" name="text">
             <a:extLst xmlns:a="http://schemas.openxmlformats.org/drawingml/2006/main">
               <a:ext uri="{FF2B5EF4-FFF2-40B4-BE49-F238E27FC236}">
-                <a16:creationId xmlns:a16="http://schemas.microsoft.com/office/drawing/2014/main" id="{D80F56BF-E68D-40FC-9547-2BC60B3574AF}"/>
+                <a16:creationId xmlns:a16="http://schemas.microsoft.com/office/drawing/2014/main" id="{F2704C0D-03A1-4895-99DA-1D0E66508C45}"/>
               </a:ext>
             </a:extLst>
           </p:cNvPr>
@@ -5990,7 +5990,7 @@
     </p:spTree>
     <p:extLst>
       <p:ext uri="{BB962C8B-B14F-4D97-AF65-F5344CB8AC3E}">
-        <p14:creationId xmlns:p14="http://schemas.microsoft.com/office/powerpoint/2010/main" val="1449183837"/>
+        <p14:creationId xmlns:p14="http://schemas.microsoft.com/office/powerpoint/2010/main" val="641430846"/>
       </p:ext>
     </p:extLst>
   </p:cSld>
@@ -6021,7 +6021,7 @@
           <p:cNvPr id="8" name="slide-title">
             <a:extLst xmlns:a="http://schemas.openxmlformats.org/drawingml/2006/main">
               <a:ext uri="{FF2B5EF4-FFF2-40B4-BE49-F238E27FC236}">
-                <a16:creationId xmlns:a16="http://schemas.microsoft.com/office/drawing/2014/main" id="{86CA1A85-45FE-4208-901D-C1AB70CAFF5C}"/>
+                <a16:creationId xmlns:a16="http://schemas.microsoft.com/office/drawing/2014/main" id="{0E180D6E-8AF5-493D-BBFF-4D7D3992E322}"/>
               </a:ext>
             </a:extLst>
           </p:cNvPr>
@@ -6079,7 +6079,7 @@
           <p:cNvPr id="2" name="">
             <a:extLst xmlns:a="http://schemas.openxmlformats.org/drawingml/2006/main">
               <a:ext uri="{FF2B5EF4-FFF2-40B4-BE49-F238E27FC236}">
-                <a16:creationId xmlns:a16="http://schemas.microsoft.com/office/drawing/2014/main" id="{55728CB1-4981-4F1F-A6ED-A50988BB5BC5}"/>
+                <a16:creationId xmlns:a16="http://schemas.microsoft.com/office/drawing/2014/main" id="{F9A7AD03-26D8-4E76-9980-5DC4EE3C9EB6}"/>
               </a:ext>
             </a:extLst>
           </p:cNvPr>
@@ -6112,7 +6112,7 @@
           <p:cNvPr id="3" name="slide-number-15">
             <a:extLst xmlns:a="http://schemas.openxmlformats.org/drawingml/2006/main">
               <a:ext uri="{FF2B5EF4-FFF2-40B4-BE49-F238E27FC236}">
-                <a16:creationId xmlns:a16="http://schemas.microsoft.com/office/drawing/2014/main" id="{7FECE094-BE17-40AF-AAAD-6CAA8C9ABAE5}"/>
+                <a16:creationId xmlns:a16="http://schemas.microsoft.com/office/drawing/2014/main" id="{ADFDD7AC-6ED9-4CB2-8FFD-3A9B726B35FF}"/>
               </a:ext>
             </a:extLst>
           </p:cNvPr>
@@ -6174,7 +6174,7 @@
           <p:nvPr/>
         </p:nvPicPr>
         <p:blipFill>
-          <a:blip xmlns:r="http://schemas.openxmlformats.org/officeDocument/2006/relationships" xmlns:a="http://schemas.openxmlformats.org/drawingml/2006/main" r:embed="Rbd5f7a33c2ba4549"/>
+          <a:blip xmlns:r="http://schemas.openxmlformats.org/officeDocument/2006/relationships" xmlns:a="http://schemas.openxmlformats.org/drawingml/2006/main" r:embed="Rd50cdf0071794301"/>
           <a:stretch xmlns:a="http://schemas.openxmlformats.org/drawingml/2006/main"/>
         </p:blipFill>
         <p:spPr>
@@ -6196,7 +6196,7 @@
           <p:nvPr/>
         </p:nvPicPr>
         <p:blipFill>
-          <a:blip xmlns:r="http://schemas.openxmlformats.org/officeDocument/2006/relationships" xmlns:a="http://schemas.openxmlformats.org/drawingml/2006/main" r:embed="R5c1e47e9b28d4bbc"/>
+          <a:blip xmlns:r="http://schemas.openxmlformats.org/officeDocument/2006/relationships" xmlns:a="http://schemas.openxmlformats.org/drawingml/2006/main" r:embed="Rcfc96a673a044a00"/>
           <a:stretch xmlns:a="http://schemas.openxmlformats.org/drawingml/2006/main"/>
         </p:blipFill>
         <p:spPr>
@@ -6214,7 +6214,7 @@
           <p:cNvPr id="6" name="text">
             <a:extLst xmlns:a="http://schemas.openxmlformats.org/drawingml/2006/main">
               <a:ext uri="{FF2B5EF4-FFF2-40B4-BE49-F238E27FC236}">
-                <a16:creationId xmlns:a16="http://schemas.microsoft.com/office/drawing/2014/main" id="{F47834B8-4F35-42FA-B98B-334FCA285F6B}"/>
+                <a16:creationId xmlns:a16="http://schemas.microsoft.com/office/drawing/2014/main" id="{44696F30-225C-462B-BE61-280203C0600D}"/>
               </a:ext>
             </a:extLst>
           </p:cNvPr>
@@ -6272,7 +6272,7 @@
           <p:cNvPr id="7" name="text">
             <a:extLst xmlns:a="http://schemas.openxmlformats.org/drawingml/2006/main">
               <a:ext uri="{FF2B5EF4-FFF2-40B4-BE49-F238E27FC236}">
-                <a16:creationId xmlns:a16="http://schemas.microsoft.com/office/drawing/2014/main" id="{AF561A77-1548-49F7-945D-3BF066437260}"/>
+                <a16:creationId xmlns:a16="http://schemas.microsoft.com/office/drawing/2014/main" id="{C31C559A-9A73-4D29-B72B-BC34A8CF585D}"/>
               </a:ext>
             </a:extLst>
           </p:cNvPr>
@@ -6328,7 +6328,7 @@
     </p:spTree>
     <p:extLst>
       <p:ext uri="{BB962C8B-B14F-4D97-AF65-F5344CB8AC3E}">
-        <p14:creationId xmlns:p14="http://schemas.microsoft.com/office/powerpoint/2010/main" val="556494000"/>
+        <p14:creationId xmlns:p14="http://schemas.microsoft.com/office/powerpoint/2010/main" val="277901726"/>
       </p:ext>
     </p:extLst>
   </p:cSld>
@@ -6359,7 +6359,7 @@
           <p:cNvPr id="11" name="slide-title">
             <a:extLst xmlns:a="http://schemas.openxmlformats.org/drawingml/2006/main">
               <a:ext uri="{FF2B5EF4-FFF2-40B4-BE49-F238E27FC236}">
-                <a16:creationId xmlns:a16="http://schemas.microsoft.com/office/drawing/2014/main" id="{40B1C3BF-B8B7-458B-BF8F-1D29ED4F1D89}"/>
+                <a16:creationId xmlns:a16="http://schemas.microsoft.com/office/drawing/2014/main" id="{5660E582-03B5-4CFE-A43D-4E77BE965E90}"/>
               </a:ext>
             </a:extLst>
           </p:cNvPr>
@@ -6417,7 +6417,7 @@
           <p:cNvPr id="2" name="">
             <a:extLst xmlns:a="http://schemas.openxmlformats.org/drawingml/2006/main">
               <a:ext uri="{FF2B5EF4-FFF2-40B4-BE49-F238E27FC236}">
-                <a16:creationId xmlns:a16="http://schemas.microsoft.com/office/drawing/2014/main" id="{4A048A30-281D-47DF-82C1-4AAD398D492C}"/>
+                <a16:creationId xmlns:a16="http://schemas.microsoft.com/office/drawing/2014/main" id="{775B8A9E-1FC0-4A88-A759-0F578AD89C65}"/>
               </a:ext>
             </a:extLst>
           </p:cNvPr>
@@ -6450,7 +6450,7 @@
           <p:cNvPr id="3" name="slide-number-16">
             <a:extLst xmlns:a="http://schemas.openxmlformats.org/drawingml/2006/main">
               <a:ext uri="{FF2B5EF4-FFF2-40B4-BE49-F238E27FC236}">
-                <a16:creationId xmlns:a16="http://schemas.microsoft.com/office/drawing/2014/main" id="{C4C732DA-15E3-4856-A3F8-988FCEF5A1B7}"/>
+                <a16:creationId xmlns:a16="http://schemas.microsoft.com/office/drawing/2014/main" id="{B5FBCB74-37AC-4A66-BADC-45157BEE2320}"/>
               </a:ext>
             </a:extLst>
           </p:cNvPr>
@@ -6508,7 +6508,7 @@
           <p:cNvPr id="4" name="text">
             <a:extLst xmlns:a="http://schemas.openxmlformats.org/drawingml/2006/main">
               <a:ext uri="{FF2B5EF4-FFF2-40B4-BE49-F238E27FC236}">
-                <a16:creationId xmlns:a16="http://schemas.microsoft.com/office/drawing/2014/main" id="{AB916BE8-38CF-49F8-9B5B-F9B16909D84B}"/>
+                <a16:creationId xmlns:a16="http://schemas.microsoft.com/office/drawing/2014/main" id="{24AE83FA-E3C1-4C77-9B99-0BB083290F1C}"/>
               </a:ext>
             </a:extLst>
           </p:cNvPr>
@@ -6566,7 +6566,7 @@
           <p:cNvPr id="5" name="text">
             <a:extLst xmlns:a="http://schemas.openxmlformats.org/drawingml/2006/main">
               <a:ext uri="{FF2B5EF4-FFF2-40B4-BE49-F238E27FC236}">
-                <a16:creationId xmlns:a16="http://schemas.microsoft.com/office/drawing/2014/main" id="{746E131B-A878-4F84-A67D-478F24FDF045}"/>
+                <a16:creationId xmlns:a16="http://schemas.microsoft.com/office/drawing/2014/main" id="{45E0C495-9959-4208-8484-15820529EFD2}"/>
               </a:ext>
             </a:extLst>
           </p:cNvPr>
@@ -6624,7 +6624,7 @@
           <p:cNvPr id="6" name="text">
             <a:extLst xmlns:a="http://schemas.openxmlformats.org/drawingml/2006/main">
               <a:ext uri="{FF2B5EF4-FFF2-40B4-BE49-F238E27FC236}">
-                <a16:creationId xmlns:a16="http://schemas.microsoft.com/office/drawing/2014/main" id="{D71A3933-7FE2-42B1-8E5D-D247E2B81D9D}"/>
+                <a16:creationId xmlns:a16="http://schemas.microsoft.com/office/drawing/2014/main" id="{2C5470C2-278B-418E-987B-ED57E42ABDD0}"/>
               </a:ext>
             </a:extLst>
           </p:cNvPr>
@@ -6682,7 +6682,7 @@
           <p:cNvPr id="7" name="text">
             <a:extLst xmlns:a="http://schemas.openxmlformats.org/drawingml/2006/main">
               <a:ext uri="{FF2B5EF4-FFF2-40B4-BE49-F238E27FC236}">
-                <a16:creationId xmlns:a16="http://schemas.microsoft.com/office/drawing/2014/main" id="{BB1091F3-71C0-4E29-8508-99BECAFB6EEF}"/>
+                <a16:creationId xmlns:a16="http://schemas.microsoft.com/office/drawing/2014/main" id="{C1C5FC49-DE00-4EDA-B9A6-78B540C870A5}"/>
               </a:ext>
             </a:extLst>
           </p:cNvPr>
@@ -6740,7 +6740,7 @@
           <p:cNvPr id="8" name="text">
             <a:extLst xmlns:a="http://schemas.openxmlformats.org/drawingml/2006/main">
               <a:ext uri="{FF2B5EF4-FFF2-40B4-BE49-F238E27FC236}">
-                <a16:creationId xmlns:a16="http://schemas.microsoft.com/office/drawing/2014/main" id="{EF82FE4D-CF2C-447A-981D-44EAF7AB4659}"/>
+                <a16:creationId xmlns:a16="http://schemas.microsoft.com/office/drawing/2014/main" id="{E3DE1F77-B84A-4D30-BC80-597EF38A5D18}"/>
               </a:ext>
             </a:extLst>
           </p:cNvPr>
@@ -6798,7 +6798,7 @@
           <p:cNvPr id="9" name="bullets">
             <a:extLst xmlns:a="http://schemas.openxmlformats.org/drawingml/2006/main">
               <a:ext uri="{FF2B5EF4-FFF2-40B4-BE49-F238E27FC236}">
-                <a16:creationId xmlns:a16="http://schemas.microsoft.com/office/drawing/2014/main" id="{ED16EB1A-65A7-46F5-9BE2-0A0AFC1B65DD}"/>
+                <a16:creationId xmlns:a16="http://schemas.microsoft.com/office/drawing/2014/main" id="{6412397A-A573-41A7-8661-C5DC05F16665}"/>
               </a:ext>
             </a:extLst>
           </p:cNvPr>
@@ -6940,7 +6940,7 @@
           <p:cNvPr id="10" name="text">
             <a:extLst xmlns:a="http://schemas.openxmlformats.org/drawingml/2006/main">
               <a:ext uri="{FF2B5EF4-FFF2-40B4-BE49-F238E27FC236}">
-                <a16:creationId xmlns:a16="http://schemas.microsoft.com/office/drawing/2014/main" id="{8D258822-CF22-4DBE-84EC-48D90483AAB1}"/>
+                <a16:creationId xmlns:a16="http://schemas.microsoft.com/office/drawing/2014/main" id="{60946EDA-186C-442E-B3CB-1EF385EE44B7}"/>
               </a:ext>
             </a:extLst>
           </p:cNvPr>
@@ -6996,7 +6996,7 @@
     </p:spTree>
     <p:extLst>
       <p:ext uri="{BB962C8B-B14F-4D97-AF65-F5344CB8AC3E}">
-        <p14:creationId xmlns:p14="http://schemas.microsoft.com/office/powerpoint/2010/main" val="1170584855"/>
+        <p14:creationId xmlns:p14="http://schemas.microsoft.com/office/powerpoint/2010/main" val="1650022461"/>
       </p:ext>
     </p:extLst>
   </p:cSld>
@@ -7027,7 +7027,7 @@
           <p:cNvPr id="10" name="slide-title">
             <a:extLst xmlns:a="http://schemas.openxmlformats.org/drawingml/2006/main">
               <a:ext uri="{FF2B5EF4-FFF2-40B4-BE49-F238E27FC236}">
-                <a16:creationId xmlns:a16="http://schemas.microsoft.com/office/drawing/2014/main" id="{E519947F-AAF4-4DEA-B857-621703D7CF66}"/>
+                <a16:creationId xmlns:a16="http://schemas.microsoft.com/office/drawing/2014/main" id="{7F44EB7D-75FC-4721-8AF5-30338F8E638B}"/>
               </a:ext>
             </a:extLst>
           </p:cNvPr>
@@ -7085,7 +7085,7 @@
           <p:cNvPr id="2" name="">
             <a:extLst xmlns:a="http://schemas.openxmlformats.org/drawingml/2006/main">
               <a:ext uri="{FF2B5EF4-FFF2-40B4-BE49-F238E27FC236}">
-                <a16:creationId xmlns:a16="http://schemas.microsoft.com/office/drawing/2014/main" id="{8C899BB7-772E-43CC-8CAC-842B4495A566}"/>
+                <a16:creationId xmlns:a16="http://schemas.microsoft.com/office/drawing/2014/main" id="{62BB2BCA-A961-4186-9A32-0D284CED7139}"/>
               </a:ext>
             </a:extLst>
           </p:cNvPr>
@@ -7118,7 +7118,7 @@
           <p:cNvPr id="3" name="slide-number-2">
             <a:extLst xmlns:a="http://schemas.openxmlformats.org/drawingml/2006/main">
               <a:ext uri="{FF2B5EF4-FFF2-40B4-BE49-F238E27FC236}">
-                <a16:creationId xmlns:a16="http://schemas.microsoft.com/office/drawing/2014/main" id="{3FF131CE-52FF-4EDF-B898-5F774E929698}"/>
+                <a16:creationId xmlns:a16="http://schemas.microsoft.com/office/drawing/2014/main" id="{500577D2-9B25-48A1-9340-23F375B95D27}"/>
               </a:ext>
             </a:extLst>
           </p:cNvPr>
@@ -7176,7 +7176,7 @@
           <p:cNvPr id="4" name="text">
             <a:extLst xmlns:a="http://schemas.openxmlformats.org/drawingml/2006/main">
               <a:ext uri="{FF2B5EF4-FFF2-40B4-BE49-F238E27FC236}">
-                <a16:creationId xmlns:a16="http://schemas.microsoft.com/office/drawing/2014/main" id="{5EBE3F23-3A9D-41B2-9109-582776378EAE}"/>
+                <a16:creationId xmlns:a16="http://schemas.microsoft.com/office/drawing/2014/main" id="{629B3A84-178F-4B09-A812-C98D40B4973A}"/>
               </a:ext>
             </a:extLst>
           </p:cNvPr>
@@ -7234,7 +7234,7 @@
           <p:cNvPr id="5" name="text">
             <a:extLst xmlns:a="http://schemas.openxmlformats.org/drawingml/2006/main">
               <a:ext uri="{FF2B5EF4-FFF2-40B4-BE49-F238E27FC236}">
-                <a16:creationId xmlns:a16="http://schemas.microsoft.com/office/drawing/2014/main" id="{A0DE52BF-3751-4562-ABC2-C5618D5C983F}"/>
+                <a16:creationId xmlns:a16="http://schemas.microsoft.com/office/drawing/2014/main" id="{16F18B47-5BC2-4B4B-8C89-525BEC5CC64F}"/>
               </a:ext>
             </a:extLst>
           </p:cNvPr>
@@ -7315,7 +7315,7 @@
           <p:cNvPr id="6" name="text">
             <a:extLst xmlns:a="http://schemas.openxmlformats.org/drawingml/2006/main">
               <a:ext uri="{FF2B5EF4-FFF2-40B4-BE49-F238E27FC236}">
-                <a16:creationId xmlns:a16="http://schemas.microsoft.com/office/drawing/2014/main" id="{F0759AAF-120B-4248-85D6-F945C9FD6F21}"/>
+                <a16:creationId xmlns:a16="http://schemas.microsoft.com/office/drawing/2014/main" id="{53B71302-F28F-4DB4-9181-F3C0A7939922}"/>
               </a:ext>
             </a:extLst>
           </p:cNvPr>
@@ -7373,7 +7373,7 @@
           <p:cNvPr id="7" name="bullets">
             <a:extLst xmlns:a="http://schemas.openxmlformats.org/drawingml/2006/main">
               <a:ext uri="{FF2B5EF4-FFF2-40B4-BE49-F238E27FC236}">
-                <a16:creationId xmlns:a16="http://schemas.microsoft.com/office/drawing/2014/main" id="{36AC4D0F-EF3C-49D8-A4D8-FFBE9755B6B0}"/>
+                <a16:creationId xmlns:a16="http://schemas.microsoft.com/office/drawing/2014/main" id="{CF543DFD-93B5-4A76-BEBD-65012E580A5A}"/>
               </a:ext>
             </a:extLst>
           </p:cNvPr>
@@ -7515,7 +7515,7 @@
           <p:cNvPr id="8" name="">
             <a:extLst xmlns:a="http://schemas.openxmlformats.org/drawingml/2006/main">
               <a:ext uri="{FF2B5EF4-FFF2-40B4-BE49-F238E27FC236}">
-                <a16:creationId xmlns:a16="http://schemas.microsoft.com/office/drawing/2014/main" id="{B3225C6A-58E8-45F5-B93C-8EF3903ED558}"/>
+                <a16:creationId xmlns:a16="http://schemas.microsoft.com/office/drawing/2014/main" id="{ADD1DCBB-368F-4D9D-B676-992218A10F20}"/>
               </a:ext>
             </a:extLst>
           </p:cNvPr>
@@ -7548,7 +7548,7 @@
           <p:cNvPr id="9" name="text">
             <a:extLst xmlns:a="http://schemas.openxmlformats.org/drawingml/2006/main">
               <a:ext uri="{FF2B5EF4-FFF2-40B4-BE49-F238E27FC236}">
-                <a16:creationId xmlns:a16="http://schemas.microsoft.com/office/drawing/2014/main" id="{36E65AD8-915F-4AB7-84B3-EEA9A905623B}"/>
+                <a16:creationId xmlns:a16="http://schemas.microsoft.com/office/drawing/2014/main" id="{BF621C3F-5CE9-4092-8255-307480B1BC11}"/>
               </a:ext>
             </a:extLst>
           </p:cNvPr>
@@ -7604,7 +7604,7 @@
     </p:spTree>
     <p:extLst>
       <p:ext uri="{BB962C8B-B14F-4D97-AF65-F5344CB8AC3E}">
-        <p14:creationId xmlns:p14="http://schemas.microsoft.com/office/powerpoint/2010/main" val="1636681177"/>
+        <p14:creationId xmlns:p14="http://schemas.microsoft.com/office/powerpoint/2010/main" val="1101435386"/>
       </p:ext>
     </p:extLst>
   </p:cSld>
@@ -7635,7 +7635,7 @@
           <p:cNvPr id="15" name="slide-title">
             <a:extLst xmlns:a="http://schemas.openxmlformats.org/drawingml/2006/main">
               <a:ext uri="{FF2B5EF4-FFF2-40B4-BE49-F238E27FC236}">
-                <a16:creationId xmlns:a16="http://schemas.microsoft.com/office/drawing/2014/main" id="{BE0007BB-7036-4534-AB1A-862175DA742A}"/>
+                <a16:creationId xmlns:a16="http://schemas.microsoft.com/office/drawing/2014/main" id="{81EAA84E-CF8B-499E-8AD1-BDE611DFFC40}"/>
               </a:ext>
             </a:extLst>
           </p:cNvPr>
@@ -7693,7 +7693,7 @@
           <p:cNvPr id="2" name="">
             <a:extLst xmlns:a="http://schemas.openxmlformats.org/drawingml/2006/main">
               <a:ext uri="{FF2B5EF4-FFF2-40B4-BE49-F238E27FC236}">
-                <a16:creationId xmlns:a16="http://schemas.microsoft.com/office/drawing/2014/main" id="{7AE9858D-89A1-4733-B2A0-F2B6D8D2E19E}"/>
+                <a16:creationId xmlns:a16="http://schemas.microsoft.com/office/drawing/2014/main" id="{B76A67A4-A380-4E79-AD81-669EC751FD04}"/>
               </a:ext>
             </a:extLst>
           </p:cNvPr>
@@ -7726,7 +7726,7 @@
           <p:cNvPr id="3" name="slide-number-3">
             <a:extLst xmlns:a="http://schemas.openxmlformats.org/drawingml/2006/main">
               <a:ext uri="{FF2B5EF4-FFF2-40B4-BE49-F238E27FC236}">
-                <a16:creationId xmlns:a16="http://schemas.microsoft.com/office/drawing/2014/main" id="{8D67D6BA-DA9E-46ED-A703-92E0F9487066}"/>
+                <a16:creationId xmlns:a16="http://schemas.microsoft.com/office/drawing/2014/main" id="{1E75451D-6D22-4BE6-AD34-60E123DE58FF}"/>
               </a:ext>
             </a:extLst>
           </p:cNvPr>
@@ -7784,7 +7784,7 @@
           <p:cNvPr id="4" name="text">
             <a:extLst xmlns:a="http://schemas.openxmlformats.org/drawingml/2006/main">
               <a:ext uri="{FF2B5EF4-FFF2-40B4-BE49-F238E27FC236}">
-                <a16:creationId xmlns:a16="http://schemas.microsoft.com/office/drawing/2014/main" id="{251B8866-4C24-4633-99DF-9B717D065107}"/>
+                <a16:creationId xmlns:a16="http://schemas.microsoft.com/office/drawing/2014/main" id="{21D9FDEB-D13B-429C-A57B-DC78683180E3}"/>
               </a:ext>
             </a:extLst>
           </p:cNvPr>
@@ -7842,7 +7842,7 @@
           <p:cNvPr id="5" name="">
             <a:extLst xmlns:a="http://schemas.openxmlformats.org/drawingml/2006/main">
               <a:ext uri="{FF2B5EF4-FFF2-40B4-BE49-F238E27FC236}">
-                <a16:creationId xmlns:a16="http://schemas.microsoft.com/office/drawing/2014/main" id="{C6F8CECA-4BB6-4716-8E5F-3BA7FBFA2993}"/>
+                <a16:creationId xmlns:a16="http://schemas.microsoft.com/office/drawing/2014/main" id="{E652BFBF-AAA7-4AA4-8553-E51234CF4C5D}"/>
               </a:ext>
             </a:extLst>
           </p:cNvPr>
@@ -7875,7 +7875,7 @@
           <p:cNvPr id="6" name="metric-customers">
             <a:extLst xmlns:a="http://schemas.openxmlformats.org/drawingml/2006/main">
               <a:ext uri="{FF2B5EF4-FFF2-40B4-BE49-F238E27FC236}">
-                <a16:creationId xmlns:a16="http://schemas.microsoft.com/office/drawing/2014/main" id="{7B4E48D6-765B-4C24-9DE2-4C3054773806}"/>
+                <a16:creationId xmlns:a16="http://schemas.microsoft.com/office/drawing/2014/main" id="{C8E96893-F651-432F-8CEB-BDDABA4A6258}"/>
               </a:ext>
             </a:extLst>
           </p:cNvPr>
@@ -7933,7 +7933,7 @@
           <p:cNvPr id="7" name="metric-label-customers">
             <a:extLst xmlns:a="http://schemas.openxmlformats.org/drawingml/2006/main">
               <a:ext uri="{FF2B5EF4-FFF2-40B4-BE49-F238E27FC236}">
-                <a16:creationId xmlns:a16="http://schemas.microsoft.com/office/drawing/2014/main" id="{D6780B7A-A7D8-4DB2-8AA2-58E5ABFB96C0}"/>
+                <a16:creationId xmlns:a16="http://schemas.microsoft.com/office/drawing/2014/main" id="{C5EB57A3-C575-4C5A-A0E1-984678077A60}"/>
               </a:ext>
             </a:extLst>
           </p:cNvPr>
@@ -7991,7 +7991,7 @@
           <p:cNvPr id="8" name="">
             <a:extLst xmlns:a="http://schemas.openxmlformats.org/drawingml/2006/main">
               <a:ext uri="{FF2B5EF4-FFF2-40B4-BE49-F238E27FC236}">
-                <a16:creationId xmlns:a16="http://schemas.microsoft.com/office/drawing/2014/main" id="{039E592C-C4CE-4F41-B729-E9FE0BA77516}"/>
+                <a16:creationId xmlns:a16="http://schemas.microsoft.com/office/drawing/2014/main" id="{7BD51E54-072C-49A5-B23E-A8C7D017F85C}"/>
               </a:ext>
             </a:extLst>
           </p:cNvPr>
@@ -8024,7 +8024,7 @@
           <p:cNvPr id="9" name="metric-training examples">
             <a:extLst xmlns:a="http://schemas.openxmlformats.org/drawingml/2006/main">
               <a:ext uri="{FF2B5EF4-FFF2-40B4-BE49-F238E27FC236}">
-                <a16:creationId xmlns:a16="http://schemas.microsoft.com/office/drawing/2014/main" id="{5DDCF55A-BBF5-4791-A34F-96F52695A321}"/>
+                <a16:creationId xmlns:a16="http://schemas.microsoft.com/office/drawing/2014/main" id="{BBA82D94-4A42-4535-86C4-3C2E7FE039F0}"/>
               </a:ext>
             </a:extLst>
           </p:cNvPr>
@@ -8082,7 +8082,7 @@
           <p:cNvPr id="10" name="metric-label-training examples">
             <a:extLst xmlns:a="http://schemas.openxmlformats.org/drawingml/2006/main">
               <a:ext uri="{FF2B5EF4-FFF2-40B4-BE49-F238E27FC236}">
-                <a16:creationId xmlns:a16="http://schemas.microsoft.com/office/drawing/2014/main" id="{477E2709-D62A-4525-926C-B37B6B7B9380}"/>
+                <a16:creationId xmlns:a16="http://schemas.microsoft.com/office/drawing/2014/main" id="{7DAA5916-4F96-4F51-8127-4B01F5774DE5}"/>
               </a:ext>
             </a:extLst>
           </p:cNvPr>
@@ -8140,7 +8140,7 @@
           <p:cNvPr id="11" name="">
             <a:extLst xmlns:a="http://schemas.openxmlformats.org/drawingml/2006/main">
               <a:ext uri="{FF2B5EF4-FFF2-40B4-BE49-F238E27FC236}">
-                <a16:creationId xmlns:a16="http://schemas.microsoft.com/office/drawing/2014/main" id="{622117BE-CC8D-49A6-BAC0-5B20A22DCBD2}"/>
+                <a16:creationId xmlns:a16="http://schemas.microsoft.com/office/drawing/2014/main" id="{363306DB-3A5B-423A-82BB-D095955DCE01}"/>
               </a:ext>
             </a:extLst>
           </p:cNvPr>
@@ -8173,7 +8173,7 @@
           <p:cNvPr id="12" name="metric-test examples">
             <a:extLst xmlns:a="http://schemas.openxmlformats.org/drawingml/2006/main">
               <a:ext uri="{FF2B5EF4-FFF2-40B4-BE49-F238E27FC236}">
-                <a16:creationId xmlns:a16="http://schemas.microsoft.com/office/drawing/2014/main" id="{8880ACD3-5D92-4343-B536-B6F8F7E7B375}"/>
+                <a16:creationId xmlns:a16="http://schemas.microsoft.com/office/drawing/2014/main" id="{B6E873F6-1EA8-435D-A29B-AC85A62E4DAB}"/>
               </a:ext>
             </a:extLst>
           </p:cNvPr>
@@ -8231,7 +8231,7 @@
           <p:cNvPr id="13" name="metric-label-test examples">
             <a:extLst xmlns:a="http://schemas.openxmlformats.org/drawingml/2006/main">
               <a:ext uri="{FF2B5EF4-FFF2-40B4-BE49-F238E27FC236}">
-                <a16:creationId xmlns:a16="http://schemas.microsoft.com/office/drawing/2014/main" id="{8787D72D-11C5-4E6F-ADAD-ACC029260B6F}"/>
+                <a16:creationId xmlns:a16="http://schemas.microsoft.com/office/drawing/2014/main" id="{F3757486-A7AD-48C4-B3D0-228240C99967}"/>
               </a:ext>
             </a:extLst>
           </p:cNvPr>
@@ -8289,7 +8289,7 @@
           <p:cNvPr id="14" name="text">
             <a:extLst xmlns:a="http://schemas.openxmlformats.org/drawingml/2006/main">
               <a:ext uri="{FF2B5EF4-FFF2-40B4-BE49-F238E27FC236}">
-                <a16:creationId xmlns:a16="http://schemas.microsoft.com/office/drawing/2014/main" id="{C39AF5B6-102B-4E95-810E-B9C6BBACFDD8}"/>
+                <a16:creationId xmlns:a16="http://schemas.microsoft.com/office/drawing/2014/main" id="{FA19056D-FA2E-41B0-B409-73DFB0BED3B4}"/>
               </a:ext>
             </a:extLst>
           </p:cNvPr>
@@ -8345,7 +8345,7 @@
     </p:spTree>
     <p:extLst>
       <p:ext uri="{BB962C8B-B14F-4D97-AF65-F5344CB8AC3E}">
-        <p14:creationId xmlns:p14="http://schemas.microsoft.com/office/powerpoint/2010/main" val="1028202578"/>
+        <p14:creationId xmlns:p14="http://schemas.microsoft.com/office/powerpoint/2010/main" val="261312259"/>
       </p:ext>
     </p:extLst>
   </p:cSld>
@@ -8376,7 +8376,7 @@
           <p:cNvPr id="8" name="slide-title">
             <a:extLst xmlns:a="http://schemas.openxmlformats.org/drawingml/2006/main">
               <a:ext uri="{FF2B5EF4-FFF2-40B4-BE49-F238E27FC236}">
-                <a16:creationId xmlns:a16="http://schemas.microsoft.com/office/drawing/2014/main" id="{DCFD2B9C-A64D-49C8-B6CA-FA02EE64F83E}"/>
+                <a16:creationId xmlns:a16="http://schemas.microsoft.com/office/drawing/2014/main" id="{52467A48-7452-410B-A455-CF9E5E233D73}"/>
               </a:ext>
             </a:extLst>
           </p:cNvPr>
@@ -8434,7 +8434,7 @@
           <p:cNvPr id="2" name="">
             <a:extLst xmlns:a="http://schemas.openxmlformats.org/drawingml/2006/main">
               <a:ext uri="{FF2B5EF4-FFF2-40B4-BE49-F238E27FC236}">
-                <a16:creationId xmlns:a16="http://schemas.microsoft.com/office/drawing/2014/main" id="{73D0450B-42F6-460A-9452-933B0574F413}"/>
+                <a16:creationId xmlns:a16="http://schemas.microsoft.com/office/drawing/2014/main" id="{9A4ECAB7-C164-4FE9-98DD-6AF101E4D14B}"/>
               </a:ext>
             </a:extLst>
           </p:cNvPr>
@@ -8467,7 +8467,7 @@
           <p:cNvPr id="3" name="slide-number-4">
             <a:extLst xmlns:a="http://schemas.openxmlformats.org/drawingml/2006/main">
               <a:ext uri="{FF2B5EF4-FFF2-40B4-BE49-F238E27FC236}">
-                <a16:creationId xmlns:a16="http://schemas.microsoft.com/office/drawing/2014/main" id="{5D256B7B-C50E-4ECB-8596-0F2DF6D19052}"/>
+                <a16:creationId xmlns:a16="http://schemas.microsoft.com/office/drawing/2014/main" id="{62663D6D-2474-44BD-9C93-4709CA36F4B7}"/>
               </a:ext>
             </a:extLst>
           </p:cNvPr>
@@ -8529,7 +8529,7 @@
           <p:nvPr/>
         </p:nvPicPr>
         <p:blipFill>
-          <a:blip xmlns:r="http://schemas.openxmlformats.org/officeDocument/2006/relationships" xmlns:a="http://schemas.openxmlformats.org/drawingml/2006/main" r:embed="R1c96d55794bd4885"/>
+          <a:blip xmlns:r="http://schemas.openxmlformats.org/officeDocument/2006/relationships" xmlns:a="http://schemas.openxmlformats.org/drawingml/2006/main" r:embed="R3a0068e116084d9a"/>
           <a:stretch xmlns:a="http://schemas.openxmlformats.org/drawingml/2006/main"/>
         </p:blipFill>
         <p:spPr>
@@ -8547,7 +8547,7 @@
           <p:cNvPr id="5" name="text">
             <a:extLst xmlns:a="http://schemas.openxmlformats.org/drawingml/2006/main">
               <a:ext uri="{FF2B5EF4-FFF2-40B4-BE49-F238E27FC236}">
-                <a16:creationId xmlns:a16="http://schemas.microsoft.com/office/drawing/2014/main" id="{6E715A23-D8F5-4FE4-B0CE-4F284E252AFE}"/>
+                <a16:creationId xmlns:a16="http://schemas.microsoft.com/office/drawing/2014/main" id="{71357AE2-0E83-4ED8-BE2F-322BB7AD46E7}"/>
               </a:ext>
             </a:extLst>
           </p:cNvPr>
@@ -8605,7 +8605,7 @@
           <p:cNvPr id="6" name="text">
             <a:extLst xmlns:a="http://schemas.openxmlformats.org/drawingml/2006/main">
               <a:ext uri="{FF2B5EF4-FFF2-40B4-BE49-F238E27FC236}">
-                <a16:creationId xmlns:a16="http://schemas.microsoft.com/office/drawing/2014/main" id="{4C16F5BB-2741-45D3-BC0C-A9BE744053B1}"/>
+                <a16:creationId xmlns:a16="http://schemas.microsoft.com/office/drawing/2014/main" id="{F716FB85-15AF-4D85-A9B5-C32B954210CA}"/>
               </a:ext>
             </a:extLst>
           </p:cNvPr>
@@ -8663,7 +8663,7 @@
           <p:cNvPr id="7" name="text">
             <a:extLst xmlns:a="http://schemas.openxmlformats.org/drawingml/2006/main">
               <a:ext uri="{FF2B5EF4-FFF2-40B4-BE49-F238E27FC236}">
-                <a16:creationId xmlns:a16="http://schemas.microsoft.com/office/drawing/2014/main" id="{3E9765DF-5BAE-4A38-BCB1-B0BD22BDA242}"/>
+                <a16:creationId xmlns:a16="http://schemas.microsoft.com/office/drawing/2014/main" id="{C33EA55C-63AF-4946-8CC8-229594955939}"/>
               </a:ext>
             </a:extLst>
           </p:cNvPr>
@@ -8719,7 +8719,7 @@
     </p:spTree>
     <p:extLst>
       <p:ext uri="{BB962C8B-B14F-4D97-AF65-F5344CB8AC3E}">
-        <p14:creationId xmlns:p14="http://schemas.microsoft.com/office/powerpoint/2010/main" val="1670175869"/>
+        <p14:creationId xmlns:p14="http://schemas.microsoft.com/office/powerpoint/2010/main" val="906978800"/>
       </p:ext>
     </p:extLst>
   </p:cSld>
@@ -8750,7 +8750,7 @@
           <p:cNvPr id="8" name="slide-title">
             <a:extLst xmlns:a="http://schemas.openxmlformats.org/drawingml/2006/main">
               <a:ext uri="{FF2B5EF4-FFF2-40B4-BE49-F238E27FC236}">
-                <a16:creationId xmlns:a16="http://schemas.microsoft.com/office/drawing/2014/main" id="{61C7FBE2-72E0-4F76-A465-5ACC64F80460}"/>
+                <a16:creationId xmlns:a16="http://schemas.microsoft.com/office/drawing/2014/main" id="{E1598DAD-2807-4846-9DA2-FB29F3494389}"/>
               </a:ext>
             </a:extLst>
           </p:cNvPr>
@@ -8808,7 +8808,7 @@
           <p:cNvPr id="2" name="">
             <a:extLst xmlns:a="http://schemas.openxmlformats.org/drawingml/2006/main">
               <a:ext uri="{FF2B5EF4-FFF2-40B4-BE49-F238E27FC236}">
-                <a16:creationId xmlns:a16="http://schemas.microsoft.com/office/drawing/2014/main" id="{71A94435-2F28-48A1-81BC-7B921B5079D7}"/>
+                <a16:creationId xmlns:a16="http://schemas.microsoft.com/office/drawing/2014/main" id="{C29259D6-D8E2-475D-AF61-6CE5CFB5EE64}"/>
               </a:ext>
             </a:extLst>
           </p:cNvPr>
@@ -8841,7 +8841,7 @@
           <p:cNvPr id="3" name="slide-number-5">
             <a:extLst xmlns:a="http://schemas.openxmlformats.org/drawingml/2006/main">
               <a:ext uri="{FF2B5EF4-FFF2-40B4-BE49-F238E27FC236}">
-                <a16:creationId xmlns:a16="http://schemas.microsoft.com/office/drawing/2014/main" id="{3CB40A87-977E-4484-9F62-89CDE1EE7339}"/>
+                <a16:creationId xmlns:a16="http://schemas.microsoft.com/office/drawing/2014/main" id="{385643EB-2506-44D3-8655-9871E02D3105}"/>
               </a:ext>
             </a:extLst>
           </p:cNvPr>
@@ -8903,7 +8903,7 @@
           <p:nvPr/>
         </p:nvPicPr>
         <p:blipFill>
-          <a:blip xmlns:r="http://schemas.openxmlformats.org/officeDocument/2006/relationships" xmlns:a="http://schemas.openxmlformats.org/drawingml/2006/main" r:embed="Rbecedf4ff4d64401"/>
+          <a:blip xmlns:r="http://schemas.openxmlformats.org/officeDocument/2006/relationships" xmlns:a="http://schemas.openxmlformats.org/drawingml/2006/main" r:embed="R1e041224bb664910"/>
           <a:stretch xmlns:a="http://schemas.openxmlformats.org/drawingml/2006/main"/>
         </p:blipFill>
         <p:spPr>
@@ -8921,7 +8921,7 @@
           <p:cNvPr id="5" name="text">
             <a:extLst xmlns:a="http://schemas.openxmlformats.org/drawingml/2006/main">
               <a:ext uri="{FF2B5EF4-FFF2-40B4-BE49-F238E27FC236}">
-                <a16:creationId xmlns:a16="http://schemas.microsoft.com/office/drawing/2014/main" id="{2493FB06-B97C-4C5E-9CB6-8718424350D2}"/>
+                <a16:creationId xmlns:a16="http://schemas.microsoft.com/office/drawing/2014/main" id="{5EDDBCA2-56E0-4AFF-AAAD-72EDF1C47D7A}"/>
               </a:ext>
             </a:extLst>
           </p:cNvPr>
@@ -8979,7 +8979,7 @@
           <p:cNvPr id="6" name="text">
             <a:extLst xmlns:a="http://schemas.openxmlformats.org/drawingml/2006/main">
               <a:ext uri="{FF2B5EF4-FFF2-40B4-BE49-F238E27FC236}">
-                <a16:creationId xmlns:a16="http://schemas.microsoft.com/office/drawing/2014/main" id="{AD24EC3D-126D-498B-8407-7B0A8C00F512}"/>
+                <a16:creationId xmlns:a16="http://schemas.microsoft.com/office/drawing/2014/main" id="{6135EDC1-FCCF-452D-AFD2-D3AD18156DFA}"/>
               </a:ext>
             </a:extLst>
           </p:cNvPr>
@@ -9060,7 +9060,7 @@
           <p:cNvPr id="7" name="text">
             <a:extLst xmlns:a="http://schemas.openxmlformats.org/drawingml/2006/main">
               <a:ext uri="{FF2B5EF4-FFF2-40B4-BE49-F238E27FC236}">
-                <a16:creationId xmlns:a16="http://schemas.microsoft.com/office/drawing/2014/main" id="{C606EF17-6098-4DCB-997F-237814EF368E}"/>
+                <a16:creationId xmlns:a16="http://schemas.microsoft.com/office/drawing/2014/main" id="{EB8CD2A0-C2AE-47A6-A91D-7DDE7F5CA0D2}"/>
               </a:ext>
             </a:extLst>
           </p:cNvPr>
@@ -9116,7 +9116,7 @@
     </p:spTree>
     <p:extLst>
       <p:ext uri="{BB962C8B-B14F-4D97-AF65-F5344CB8AC3E}">
-        <p14:creationId xmlns:p14="http://schemas.microsoft.com/office/powerpoint/2010/main" val="1270555946"/>
+        <p14:creationId xmlns:p14="http://schemas.microsoft.com/office/powerpoint/2010/main" val="534825548"/>
       </p:ext>
     </p:extLst>
   </p:cSld>
@@ -9147,7 +9147,7 @@
           <p:cNvPr id="9" name="slide-title">
             <a:extLst xmlns:a="http://schemas.openxmlformats.org/drawingml/2006/main">
               <a:ext uri="{FF2B5EF4-FFF2-40B4-BE49-F238E27FC236}">
-                <a16:creationId xmlns:a16="http://schemas.microsoft.com/office/drawing/2014/main" id="{099CBC1E-7EB1-42ED-9DE2-DBC14963F71E}"/>
+                <a16:creationId xmlns:a16="http://schemas.microsoft.com/office/drawing/2014/main" id="{8DB52FE1-9138-47FD-95EC-92CFEE31B8AE}"/>
               </a:ext>
             </a:extLst>
           </p:cNvPr>
@@ -9205,7 +9205,7 @@
           <p:cNvPr id="2" name="">
             <a:extLst xmlns:a="http://schemas.openxmlformats.org/drawingml/2006/main">
               <a:ext uri="{FF2B5EF4-FFF2-40B4-BE49-F238E27FC236}">
-                <a16:creationId xmlns:a16="http://schemas.microsoft.com/office/drawing/2014/main" id="{78F07AF6-6DB6-4158-B2A7-57A76D3B7105}"/>
+                <a16:creationId xmlns:a16="http://schemas.microsoft.com/office/drawing/2014/main" id="{8699344B-9168-4A23-AEC0-77D6E11F794F}"/>
               </a:ext>
             </a:extLst>
           </p:cNvPr>
@@ -9238,7 +9238,7 @@
           <p:cNvPr id="3" name="slide-number-6">
             <a:extLst xmlns:a="http://schemas.openxmlformats.org/drawingml/2006/main">
               <a:ext uri="{FF2B5EF4-FFF2-40B4-BE49-F238E27FC236}">
-                <a16:creationId xmlns:a16="http://schemas.microsoft.com/office/drawing/2014/main" id="{C1566109-6B51-48AF-A588-7A8685DE4283}"/>
+                <a16:creationId xmlns:a16="http://schemas.microsoft.com/office/drawing/2014/main" id="{3850706C-0DD9-492A-81F7-D841EA694B51}"/>
               </a:ext>
             </a:extLst>
           </p:cNvPr>
@@ -9300,7 +9300,7 @@
           <p:nvPr/>
         </p:nvPicPr>
         <p:blipFill>
-          <a:blip xmlns:r="http://schemas.openxmlformats.org/officeDocument/2006/relationships" xmlns:a="http://schemas.openxmlformats.org/drawingml/2006/main" r:embed="R1eccb8c609da4886"/>
+          <a:blip xmlns:r="http://schemas.openxmlformats.org/officeDocument/2006/relationships" xmlns:a="http://schemas.openxmlformats.org/drawingml/2006/main" r:embed="R254450b80d4747a4"/>
           <a:stretch xmlns:a="http://schemas.openxmlformats.org/drawingml/2006/main"/>
         </p:blipFill>
         <p:spPr>
@@ -9318,7 +9318,7 @@
           <p:cNvPr id="5" name="text">
             <a:extLst xmlns:a="http://schemas.openxmlformats.org/drawingml/2006/main">
               <a:ext uri="{FF2B5EF4-FFF2-40B4-BE49-F238E27FC236}">
-                <a16:creationId xmlns:a16="http://schemas.microsoft.com/office/drawing/2014/main" id="{0F90377F-EAFD-48D2-A2AF-31AAD7752CFA}"/>
+                <a16:creationId xmlns:a16="http://schemas.microsoft.com/office/drawing/2014/main" id="{F5C3A58F-520B-452B-BD46-12B36680932F}"/>
               </a:ext>
             </a:extLst>
           </p:cNvPr>
@@ -9376,7 +9376,7 @@
           <p:cNvPr id="6" name="text">
             <a:extLst xmlns:a="http://schemas.openxmlformats.org/drawingml/2006/main">
               <a:ext uri="{FF2B5EF4-FFF2-40B4-BE49-F238E27FC236}">
-                <a16:creationId xmlns:a16="http://schemas.microsoft.com/office/drawing/2014/main" id="{680EF85D-1E23-44FE-98F6-2DD2666CE0BE}"/>
+                <a16:creationId xmlns:a16="http://schemas.microsoft.com/office/drawing/2014/main" id="{EC11A45B-22F2-4186-B223-C81E689630E2}"/>
               </a:ext>
             </a:extLst>
           </p:cNvPr>
@@ -9434,7 +9434,7 @@
           <p:cNvPr id="7" name="text">
             <a:extLst xmlns:a="http://schemas.openxmlformats.org/drawingml/2006/main">
               <a:ext uri="{FF2B5EF4-FFF2-40B4-BE49-F238E27FC236}">
-                <a16:creationId xmlns:a16="http://schemas.microsoft.com/office/drawing/2014/main" id="{6B0486E4-CE56-49FD-95E0-B80FB8D43227}"/>
+                <a16:creationId xmlns:a16="http://schemas.microsoft.com/office/drawing/2014/main" id="{68DAC416-94AC-4CFB-9DA2-76296471D7BF}"/>
               </a:ext>
             </a:extLst>
           </p:cNvPr>
@@ -9492,7 +9492,7 @@
           <p:cNvPr id="8" name="text">
             <a:extLst xmlns:a="http://schemas.openxmlformats.org/drawingml/2006/main">
               <a:ext uri="{FF2B5EF4-FFF2-40B4-BE49-F238E27FC236}">
-                <a16:creationId xmlns:a16="http://schemas.microsoft.com/office/drawing/2014/main" id="{AD6A6529-B963-4637-BAD4-D84554071438}"/>
+                <a16:creationId xmlns:a16="http://schemas.microsoft.com/office/drawing/2014/main" id="{7E2CEB07-D525-4B8E-AA0B-F7768A746191}"/>
               </a:ext>
             </a:extLst>
           </p:cNvPr>
@@ -9548,7 +9548,7 @@
     </p:spTree>
     <p:extLst>
       <p:ext uri="{BB962C8B-B14F-4D97-AF65-F5344CB8AC3E}">
-        <p14:creationId xmlns:p14="http://schemas.microsoft.com/office/powerpoint/2010/main" val="153599810"/>
+        <p14:creationId xmlns:p14="http://schemas.microsoft.com/office/powerpoint/2010/main" val="149705025"/>
       </p:ext>
     </p:extLst>
   </p:cSld>
@@ -9579,7 +9579,7 @@
           <p:cNvPr id="8" name="slide-title">
             <a:extLst xmlns:a="http://schemas.openxmlformats.org/drawingml/2006/main">
               <a:ext uri="{FF2B5EF4-FFF2-40B4-BE49-F238E27FC236}">
-                <a16:creationId xmlns:a16="http://schemas.microsoft.com/office/drawing/2014/main" id="{D6B5EB96-469A-4509-9765-AE12FE25C549}"/>
+                <a16:creationId xmlns:a16="http://schemas.microsoft.com/office/drawing/2014/main" id="{6D7E3068-4958-440B-AC95-A8AEA38A565B}"/>
               </a:ext>
             </a:extLst>
           </p:cNvPr>
@@ -9637,7 +9637,7 @@
           <p:cNvPr id="2" name="">
             <a:extLst xmlns:a="http://schemas.openxmlformats.org/drawingml/2006/main">
               <a:ext uri="{FF2B5EF4-FFF2-40B4-BE49-F238E27FC236}">
-                <a16:creationId xmlns:a16="http://schemas.microsoft.com/office/drawing/2014/main" id="{C327B563-7D20-49BD-8D3A-8705EE0515B7}"/>
+                <a16:creationId xmlns:a16="http://schemas.microsoft.com/office/drawing/2014/main" id="{B1F575C5-52B6-46DB-B3FC-A1ACAC3F5016}"/>
               </a:ext>
             </a:extLst>
           </p:cNvPr>
@@ -9670,7 +9670,7 @@
           <p:cNvPr id="3" name="slide-number-7">
             <a:extLst xmlns:a="http://schemas.openxmlformats.org/drawingml/2006/main">
               <a:ext uri="{FF2B5EF4-FFF2-40B4-BE49-F238E27FC236}">
-                <a16:creationId xmlns:a16="http://schemas.microsoft.com/office/drawing/2014/main" id="{E25030F1-1049-4F63-88B2-7905CE4992B5}"/>
+                <a16:creationId xmlns:a16="http://schemas.microsoft.com/office/drawing/2014/main" id="{EA5689F0-FC64-43FA-90E4-187F4EF1AFC8}"/>
               </a:ext>
             </a:extLst>
           </p:cNvPr>
@@ -9732,7 +9732,7 @@
           <p:nvPr/>
         </p:nvPicPr>
         <p:blipFill>
-          <a:blip xmlns:r="http://schemas.openxmlformats.org/officeDocument/2006/relationships" xmlns:a="http://schemas.openxmlformats.org/drawingml/2006/main" r:embed="Rffbb4f03f6ef4bb9"/>
+          <a:blip xmlns:r="http://schemas.openxmlformats.org/officeDocument/2006/relationships" xmlns:a="http://schemas.openxmlformats.org/drawingml/2006/main" r:embed="Rd5f9b43c4e4a4de4"/>
           <a:stretch xmlns:a="http://schemas.openxmlformats.org/drawingml/2006/main"/>
         </p:blipFill>
         <p:spPr>
@@ -9754,7 +9754,7 @@
           <p:nvPr/>
         </p:nvPicPr>
         <p:blipFill>
-          <a:blip xmlns:r="http://schemas.openxmlformats.org/officeDocument/2006/relationships" xmlns:a="http://schemas.openxmlformats.org/drawingml/2006/main" r:embed="Rb4e19b7e58b643f0"/>
+          <a:blip xmlns:r="http://schemas.openxmlformats.org/officeDocument/2006/relationships" xmlns:a="http://schemas.openxmlformats.org/drawingml/2006/main" r:embed="R7af9788d8ce44c1a"/>
           <a:stretch xmlns:a="http://schemas.openxmlformats.org/drawingml/2006/main"/>
         </p:blipFill>
         <p:spPr>
@@ -9772,7 +9772,7 @@
           <p:cNvPr id="6" name="text">
             <a:extLst xmlns:a="http://schemas.openxmlformats.org/drawingml/2006/main">
               <a:ext uri="{FF2B5EF4-FFF2-40B4-BE49-F238E27FC236}">
-                <a16:creationId xmlns:a16="http://schemas.microsoft.com/office/drawing/2014/main" id="{33B804C5-7A0B-47AF-8A11-234A6A8C3979}"/>
+                <a16:creationId xmlns:a16="http://schemas.microsoft.com/office/drawing/2014/main" id="{713BB59B-AF83-4494-AEED-88833019446B}"/>
               </a:ext>
             </a:extLst>
           </p:cNvPr>
@@ -9830,7 +9830,7 @@
           <p:cNvPr id="7" name="text">
             <a:extLst xmlns:a="http://schemas.openxmlformats.org/drawingml/2006/main">
               <a:ext uri="{FF2B5EF4-FFF2-40B4-BE49-F238E27FC236}">
-                <a16:creationId xmlns:a16="http://schemas.microsoft.com/office/drawing/2014/main" id="{14F53FF3-C234-4E55-B07A-9480C6F6D1C9}"/>
+                <a16:creationId xmlns:a16="http://schemas.microsoft.com/office/drawing/2014/main" id="{8F2F5983-ECC9-4E92-8EB8-011F81A9147E}"/>
               </a:ext>
             </a:extLst>
           </p:cNvPr>
@@ -9886,7 +9886,7 @@
     </p:spTree>
     <p:extLst>
       <p:ext uri="{BB962C8B-B14F-4D97-AF65-F5344CB8AC3E}">
-        <p14:creationId xmlns:p14="http://schemas.microsoft.com/office/powerpoint/2010/main" val="205398429"/>
+        <p14:creationId xmlns:p14="http://schemas.microsoft.com/office/powerpoint/2010/main" val="780971634"/>
       </p:ext>
     </p:extLst>
   </p:cSld>
@@ -9917,7 +9917,7 @@
           <p:cNvPr id="7" name="slide-title">
             <a:extLst xmlns:a="http://schemas.openxmlformats.org/drawingml/2006/main">
               <a:ext uri="{FF2B5EF4-FFF2-40B4-BE49-F238E27FC236}">
-                <a16:creationId xmlns:a16="http://schemas.microsoft.com/office/drawing/2014/main" id="{FEB88481-F200-4A10-84E1-38A64C381BA6}"/>
+                <a16:creationId xmlns:a16="http://schemas.microsoft.com/office/drawing/2014/main" id="{46F1DFFC-003C-4F78-9706-1BC16A70109D}"/>
               </a:ext>
             </a:extLst>
           </p:cNvPr>
@@ -9975,7 +9975,7 @@
           <p:cNvPr id="2" name="">
             <a:extLst xmlns:a="http://schemas.openxmlformats.org/drawingml/2006/main">
               <a:ext uri="{FF2B5EF4-FFF2-40B4-BE49-F238E27FC236}">
-                <a16:creationId xmlns:a16="http://schemas.microsoft.com/office/drawing/2014/main" id="{ECB6F044-8A86-40C2-B9D8-722B94C7E66A}"/>
+                <a16:creationId xmlns:a16="http://schemas.microsoft.com/office/drawing/2014/main" id="{DDD2AD6B-FE62-4D93-B62F-0A7B0269E6F4}"/>
               </a:ext>
             </a:extLst>
           </p:cNvPr>
@@ -10008,7 +10008,7 @@
           <p:cNvPr id="3" name="slide-number-8">
             <a:extLst xmlns:a="http://schemas.openxmlformats.org/drawingml/2006/main">
               <a:ext uri="{FF2B5EF4-FFF2-40B4-BE49-F238E27FC236}">
-                <a16:creationId xmlns:a16="http://schemas.microsoft.com/office/drawing/2014/main" id="{5B800C04-1CAA-419C-8C59-94E6251BAF2C}"/>
+                <a16:creationId xmlns:a16="http://schemas.microsoft.com/office/drawing/2014/main" id="{93CD0B32-C81C-427C-BC2C-90B8D8F36E56}"/>
               </a:ext>
             </a:extLst>
           </p:cNvPr>
@@ -10070,7 +10070,7 @@
           <p:nvPr/>
         </p:nvPicPr>
         <p:blipFill>
-          <a:blip xmlns:r="http://schemas.openxmlformats.org/officeDocument/2006/relationships" xmlns:a="http://schemas.openxmlformats.org/drawingml/2006/main" r:embed="R25c9a00edc754648"/>
+          <a:blip xmlns:r="http://schemas.openxmlformats.org/officeDocument/2006/relationships" xmlns:a="http://schemas.openxmlformats.org/drawingml/2006/main" r:embed="R9c1eaaf90fa34740"/>
           <a:stretch xmlns:a="http://schemas.openxmlformats.org/drawingml/2006/main"/>
         </p:blipFill>
         <p:spPr>
@@ -10088,7 +10088,7 @@
           <p:cNvPr id="5" name="text">
             <a:extLst xmlns:a="http://schemas.openxmlformats.org/drawingml/2006/main">
               <a:ext uri="{FF2B5EF4-FFF2-40B4-BE49-F238E27FC236}">
-                <a16:creationId xmlns:a16="http://schemas.microsoft.com/office/drawing/2014/main" id="{4662146C-E9B9-46AC-8898-0AF55F7089EF}"/>
+                <a16:creationId xmlns:a16="http://schemas.microsoft.com/office/drawing/2014/main" id="{7BCEF8A5-3D75-4226-A48E-5A258D54D1A4}"/>
               </a:ext>
             </a:extLst>
           </p:cNvPr>
@@ -10146,7 +10146,7 @@
           <p:cNvPr id="6" name="text">
             <a:extLst xmlns:a="http://schemas.openxmlformats.org/drawingml/2006/main">
               <a:ext uri="{FF2B5EF4-FFF2-40B4-BE49-F238E27FC236}">
-                <a16:creationId xmlns:a16="http://schemas.microsoft.com/office/drawing/2014/main" id="{2F3A53CD-8F76-4A02-AE4C-A9A035CCE5B2}"/>
+                <a16:creationId xmlns:a16="http://schemas.microsoft.com/office/drawing/2014/main" id="{2D0A6CB6-6014-4533-BC05-43C0D115762B}"/>
               </a:ext>
             </a:extLst>
           </p:cNvPr>
@@ -10202,7 +10202,7 @@
     </p:spTree>
     <p:extLst>
       <p:ext uri="{BB962C8B-B14F-4D97-AF65-F5344CB8AC3E}">
-        <p14:creationId xmlns:p14="http://schemas.microsoft.com/office/powerpoint/2010/main" val="1937073387"/>
+        <p14:creationId xmlns:p14="http://schemas.microsoft.com/office/powerpoint/2010/main" val="1710788486"/>
       </p:ext>
     </p:extLst>
   </p:cSld>
@@ -10233,7 +10233,7 @@
           <p:cNvPr id="11" name="slide-title">
             <a:extLst xmlns:a="http://schemas.openxmlformats.org/drawingml/2006/main">
               <a:ext uri="{FF2B5EF4-FFF2-40B4-BE49-F238E27FC236}">
-                <a16:creationId xmlns:a16="http://schemas.microsoft.com/office/drawing/2014/main" id="{FD6D5C86-B208-4F0B-9441-8766973FA780}"/>
+                <a16:creationId xmlns:a16="http://schemas.microsoft.com/office/drawing/2014/main" id="{2758966A-3338-47E4-9722-246A157DC6FF}"/>
               </a:ext>
             </a:extLst>
           </p:cNvPr>
@@ -10291,7 +10291,7 @@
           <p:cNvPr id="2" name="">
             <a:extLst xmlns:a="http://schemas.openxmlformats.org/drawingml/2006/main">
               <a:ext uri="{FF2B5EF4-FFF2-40B4-BE49-F238E27FC236}">
-                <a16:creationId xmlns:a16="http://schemas.microsoft.com/office/drawing/2014/main" id="{23421A84-56A0-4DB1-A289-62542C5ED04F}"/>
+                <a16:creationId xmlns:a16="http://schemas.microsoft.com/office/drawing/2014/main" id="{3FCB7C74-83C9-48DA-ABAB-FE312B63C9E9}"/>
               </a:ext>
             </a:extLst>
           </p:cNvPr>
@@ -10324,7 +10324,7 @@
           <p:cNvPr id="3" name="slide-number-9">
             <a:extLst xmlns:a="http://schemas.openxmlformats.org/drawingml/2006/main">
               <a:ext uri="{FF2B5EF4-FFF2-40B4-BE49-F238E27FC236}">
-                <a16:creationId xmlns:a16="http://schemas.microsoft.com/office/drawing/2014/main" id="{45BC9BA6-80EC-4217-BBEA-E51774A8FC3A}"/>
+                <a16:creationId xmlns:a16="http://schemas.microsoft.com/office/drawing/2014/main" id="{1C0EA970-BD06-4FE3-8DCB-4435354BC597}"/>
               </a:ext>
             </a:extLst>
           </p:cNvPr>
@@ -10386,7 +10386,7 @@
           <p:nvPr/>
         </p:nvPicPr>
         <p:blipFill>
-          <a:blip xmlns:r="http://schemas.openxmlformats.org/officeDocument/2006/relationships" xmlns:a="http://schemas.openxmlformats.org/drawingml/2006/main" r:embed="R4875062801994412"/>
+          <a:blip xmlns:r="http://schemas.openxmlformats.org/officeDocument/2006/relationships" xmlns:a="http://schemas.openxmlformats.org/drawingml/2006/main" r:embed="Rfe3e80a07df94857"/>
           <a:stretch xmlns:a="http://schemas.openxmlformats.org/drawingml/2006/main"/>
         </p:blipFill>
         <p:spPr>
@@ -10404,7 +10404,7 @@
           <p:cNvPr id="5" name="text">
             <a:extLst xmlns:a="http://schemas.openxmlformats.org/drawingml/2006/main">
               <a:ext uri="{FF2B5EF4-FFF2-40B4-BE49-F238E27FC236}">
-                <a16:creationId xmlns:a16="http://schemas.microsoft.com/office/drawing/2014/main" id="{BB38005B-E98F-4B9C-BC7E-2563F94689AC}"/>
+                <a16:creationId xmlns:a16="http://schemas.microsoft.com/office/drawing/2014/main" id="{3CA38411-1A47-4DD4-AFCE-99FF2E53A07D}"/>
               </a:ext>
             </a:extLst>
           </p:cNvPr>
@@ -10462,7 +10462,7 @@
           <p:cNvPr id="6" name="text">
             <a:extLst xmlns:a="http://schemas.openxmlformats.org/drawingml/2006/main">
               <a:ext uri="{FF2B5EF4-FFF2-40B4-BE49-F238E27FC236}">
-                <a16:creationId xmlns:a16="http://schemas.microsoft.com/office/drawing/2014/main" id="{71C844C4-CBD8-4549-891D-E1BD9096F099}"/>
+                <a16:creationId xmlns:a16="http://schemas.microsoft.com/office/drawing/2014/main" id="{C517B1AC-625E-4F91-9F16-F8BA5907178B}"/>
               </a:ext>
             </a:extLst>
           </p:cNvPr>
@@ -10520,7 +10520,7 @@
           <p:cNvPr id="7" name="text">
             <a:extLst xmlns:a="http://schemas.openxmlformats.org/drawingml/2006/main">
               <a:ext uri="{FF2B5EF4-FFF2-40B4-BE49-F238E27FC236}">
-                <a16:creationId xmlns:a16="http://schemas.microsoft.com/office/drawing/2014/main" id="{A9500D0B-07A0-4743-B6C3-8F08ADB6CED1}"/>
+                <a16:creationId xmlns:a16="http://schemas.microsoft.com/office/drawing/2014/main" id="{AAB978A7-479F-4374-9C20-E21A53BB50FB}"/>
               </a:ext>
             </a:extLst>
           </p:cNvPr>
@@ -10578,7 +10578,7 @@
           <p:cNvPr id="8" name="text">
             <a:extLst xmlns:a="http://schemas.openxmlformats.org/drawingml/2006/main">
               <a:ext uri="{FF2B5EF4-FFF2-40B4-BE49-F238E27FC236}">
-                <a16:creationId xmlns:a16="http://schemas.microsoft.com/office/drawing/2014/main" id="{D76C7539-682F-49E4-B7F3-0EFBACD5500A}"/>
+                <a16:creationId xmlns:a16="http://schemas.microsoft.com/office/drawing/2014/main" id="{AC774381-E11E-41DC-B631-6C0F09AC20B9}"/>
               </a:ext>
             </a:extLst>
           </p:cNvPr>
@@ -10636,7 +10636,7 @@
           <p:cNvPr id="9" name="text">
             <a:extLst xmlns:a="http://schemas.openxmlformats.org/drawingml/2006/main">
               <a:ext uri="{FF2B5EF4-FFF2-40B4-BE49-F238E27FC236}">
-                <a16:creationId xmlns:a16="http://schemas.microsoft.com/office/drawing/2014/main" id="{E86BAB52-7467-40F5-842F-49EB23FA4B91}"/>
+                <a16:creationId xmlns:a16="http://schemas.microsoft.com/office/drawing/2014/main" id="{02DFA578-E876-4777-ADB1-787785EA4B8C}"/>
               </a:ext>
             </a:extLst>
           </p:cNvPr>
@@ -10694,7 +10694,7 @@
           <p:cNvPr id="10" name="text">
             <a:extLst xmlns:a="http://schemas.openxmlformats.org/drawingml/2006/main">
               <a:ext uri="{FF2B5EF4-FFF2-40B4-BE49-F238E27FC236}">
-                <a16:creationId xmlns:a16="http://schemas.microsoft.com/office/drawing/2014/main" id="{94706803-0A30-43F9-B79E-D7E2DB4FEC08}"/>
+                <a16:creationId xmlns:a16="http://schemas.microsoft.com/office/drawing/2014/main" id="{8DB7DD76-298B-495F-9BB8-C2CCA3D3A878}"/>
               </a:ext>
             </a:extLst>
           </p:cNvPr>
@@ -10750,7 +10750,7 @@
     </p:spTree>
     <p:extLst>
       <p:ext uri="{BB962C8B-B14F-4D97-AF65-F5344CB8AC3E}">
-        <p14:creationId xmlns:p14="http://schemas.microsoft.com/office/powerpoint/2010/main" val="1218397807"/>
+        <p14:creationId xmlns:p14="http://schemas.microsoft.com/office/powerpoint/2010/main" val="1258339584"/>
       </p:ext>
     </p:extLst>
   </p:cSld>
